--- a/docs/slides.pptx
+++ b/docs/slides.pptx
@@ -22,6 +22,11 @@
     <p:sldId id="270" r:id="rId22"/>
     <p:sldId id="271" r:id="rId23"/>
     <p:sldId id="272" r:id="rId24"/>
+    <p:sldId id="273" r:id="rId25"/>
+    <p:sldId id="274" r:id="rId26"/>
+    <p:sldId id="275" r:id="rId27"/>
+    <p:sldId id="276" r:id="rId28"/>
+    <p:sldId id="277" r:id="rId29"/>
   </p:sldIdLst>
   <p:sldSz cx="12191695" cy="6858000" type="screen4x3"/>
   <p:notesSz cx="6858000" cy="9144000"/>
@@ -518,7 +523,7 @@
           <a:lstStyle/>
           <a:p>
             <a:r>
-              <a:t>Before you merge cells or coarsen a netlist, you need a score that says these two should stay together. That score is affinity. In this module you’ll compare plain edge weight with shared-neighbor scoring on the same tiny graph—and watch who wants to merge first. Then you’ll see a graph where the two scores disagree, and a third score for real netlists, where one net can touch many cells.</a:t>
+              <a:t>Which parts of a chip belong together? That is the question this lab answers. A chip is made of millions of tiny parts called cells. Before a computer can arrange them, it needs to know which cells like to stay close. That liking is a number called affinity. In this lab you'll learn three ways to compute it, and see why the choice matters.</a:t>
             </a:r>
           </a:p>
         </p:txBody>
@@ -588,7 +593,7 @@
           <a:lstStyle/>
           <a:p>
             <a:r>
-              <a:t>Real netlists aren't simple edges. One net can connect many cells, like a reset or an enable line. If you count every shared net at full weight, cells A and B look close just because both see reset. Pin-count scoring fixes this. Each net splits its weight across its pins: weight divided by pins minus one. A two-pin net counts fully. A five-pin net gives only a quarter to each pair.</a:t>
+              <a:t>Let's compute one score together, step by step. Step one: the direct edge A–C has weight one. Step two: A and C have one neighbor in common, B. The links through B weigh five and four, so we keep the smaller one: four. Step three: add them up, one plus four makes five. A–C was weak alone, but becomes strong once its shared friend counts.</a:t>
             </a:r>
           </a:p>
         </p:txBody>
@@ -658,7 +663,7 @@
           <a:lstStyle/>
           <a:p>
             <a:r>
-              <a:t>In the browser lab, you do the scoring. Click two nodes to pick a pair, even a pair with no edge, work out its score by hand, and type it in. You can also build your own ranking, one pair at a time, and change edge weights to see which pair merges first. You can switch between all three graphs and all the scores. The ten challenges check what you typed, your ranking and your edits. The breakdown and the full ranking are there for study, but anything they reveal no longer counts.</a:t>
+              <a:t>With recipe two, our small graph gives ten pairs instead of six. Four of them have no wire at all between them. For example, B and D are not wired together, but both are wired to C. So B–D gets the weaker of those two links: two. It's like two people who have never met but share a best friend. Only pairs whose score would be zero are left out.</a:t>
             </a:r>
           </a:p>
         </p:txBody>
@@ -728,7 +733,7 @@
           <a:lstStyle/>
           <a:p>
             <a:r>
-              <a:t>In the implement track, print both rankings for the starter graph, then for the priority graph, and compare the first line of each table. Then write your own scoring functions, including pin-count, and run the golden checker on your file. It checks all three scores, and it feeds the edges in a scrambled order, so a missing tie-break shows up as a failure.</a:t>
+              <a:t>Here is recipe two written as steps a computer can follow. First, every edge adds its weight to its own pair. Next, for every pair of nodes, look at each neighbor they have in common. For each shared neighbor, add the smaller of its two links to the pair. Keep every pair whose score ends up above zero. Finally, sort from highest to lowest score, and break ties alphabetically.</a:t>
             </a:r>
           </a:p>
         </p:txBody>
@@ -798,7 +803,7 @@
           <a:lstStyle/>
           <a:p>
             <a:r>
-              <a:t>Watch for four things. Counting an undirected edge twice, once from each end. Adding the larger spoke instead of the smaller one, which makes everything look close. Forgetting the tie-break, so A–B and D–E swap places from run to run. And using raw net counts on a netlist, where wide nets like reset glue unrelated cells together.</a:t>
+              <a:t>Here's a second example that shows why the recipe matters. Take a tight triangle P, Q, R, with every edge at weight four. Next to it, a lone pair X–Y has weight five. Recipe one picks X–Y first, because five beats four. Recipe two gives P–Q four, plus four through R: eight, so P–Q goes first. Same graph, same merge rule, but a different first merge.</a:t>
             </a:r>
           </a:p>
         </p:txBody>
@@ -868,7 +873,357 @@
           <a:lstStyle/>
           <a:p>
             <a:r>
-              <a:t>Match all three golden checks, then explain two things in your own words: why A–C climbs under shared-neighbor scoring, and why the priority graph changes its first merge. Take the short quiz, then continue to greedy pair merge, where these scores become the merge policy.</a:t>
+              <a:t>On a real chip, one wire can connect many cells at once. Such a shared wire is called a net, and each cell it touches is a pin. Think of a group chat with fifty people: it says little about who is friends. A private message between two people says much more. Recipe three works the same way: each net shares its weight among its pins. The rule is the weight divided by the number of pins, minus one. Here, the enable and reset nets touch five cells each, so they give only a quarter to each pair. The private net between E and F gives its full weight, one.</a:t>
+            </a:r>
+          </a:p>
+        </p:txBody>
+      </p:sp>
+      <p:sp>
+        <p:nvSpPr>
+          <p:cNvPr id="4" name="Slide Number Placeholder 3"/>
+          <p:cNvSpPr>
+            <a:spLocks noGrp="1"/>
+          </p:cNvSpPr>
+          <p:nvPr>
+            <p:ph type="sldNum" idx="5" sz="quarter"/>
+          </p:nvPr>
+        </p:nvSpPr>
+        <p:spPr/>
+      </p:sp>
+    </p:spTree>
+  </p:cSld>
+  <p:clrMapOvr>
+    <a:masterClrMapping/>
+  </p:clrMapOvr>
+</p:notes>
+</file>
+
+<file path=ppt/notesSlides/notesSlide15.xml><?xml version="1.0" encoding="utf-8"?>
+<p:notes xmlns:a="http://schemas.openxmlformats.org/drawingml/2006/main" xmlns:p="http://schemas.openxmlformats.org/presentationml/2006/main" xmlns:r="http://schemas.openxmlformats.org/officeDocument/2006/relationships">
+  <p:cSld>
+    <p:spTree>
+      <p:nvGrpSpPr>
+        <p:cNvPr id="1" name=""/>
+        <p:cNvGrpSpPr/>
+        <p:nvPr/>
+      </p:nvGrpSpPr>
+      <p:grpSpPr>
+        <a:xfrm>
+          <a:off x="0" y="0"/>
+          <a:ext cx="0" cy="0"/>
+          <a:chOff x="0" y="0"/>
+          <a:chExt cx="0" cy="0"/>
+        </a:xfrm>
+      </p:grpSpPr>
+      <p:sp>
+        <p:nvSpPr>
+          <p:cNvPr id="2" name="Slide Image Placeholder 1"/>
+          <p:cNvSpPr>
+            <a:spLocks noGrp="1"/>
+          </p:cNvSpPr>
+          <p:nvPr>
+            <p:ph type="sldImg" idx="2"/>
+          </p:nvPr>
+        </p:nvSpPr>
+        <p:spPr/>
+      </p:sp>
+      <p:sp>
+        <p:nvSpPr>
+          <p:cNvPr id="3" name="Notes Placeholder 2"/>
+          <p:cNvSpPr>
+            <a:spLocks noGrp="1"/>
+          </p:cNvSpPr>
+          <p:nvPr>
+            <p:ph type="body" idx="3" sz="quarter"/>
+          </p:nvPr>
+        </p:nvSpPr>
+        <p:spPr/>
+        <p:txBody>
+          <a:bodyPr/>
+          <a:lstStyle/>
+          <a:p>
+            <a:r>
+              <a:t>Now it's your turn to compute scores, in the browser lab. Click two nodes to pick a pair, even a pair with no edge, work out its score by hand, and type it in. The lab tells you right away if you're correct. You can also build your own ranking, one pair at a time, and change edge weights to see which pair merges first. The ten challenges go from easy to hard. If you get stuck, the breakdown button shows the calculation, but that answer no longer counts for the challenge.</a:t>
+            </a:r>
+          </a:p>
+        </p:txBody>
+      </p:sp>
+      <p:sp>
+        <p:nvSpPr>
+          <p:cNvPr id="4" name="Slide Number Placeholder 3"/>
+          <p:cNvSpPr>
+            <a:spLocks noGrp="1"/>
+          </p:cNvSpPr>
+          <p:nvPr>
+            <p:ph type="sldNum" idx="5" sz="quarter"/>
+          </p:nvPr>
+        </p:nvSpPr>
+        <p:spPr/>
+      </p:sp>
+    </p:spTree>
+  </p:cSld>
+  <p:clrMapOvr>
+    <a:masterClrMapping/>
+  </p:clrMapOvr>
+</p:notes>
+</file>
+
+<file path=ppt/notesSlides/notesSlide16.xml><?xml version="1.0" encoding="utf-8"?>
+<p:notes xmlns:a="http://schemas.openxmlformats.org/drawingml/2006/main" xmlns:p="http://schemas.openxmlformats.org/presentationml/2006/main" xmlns:r="http://schemas.openxmlformats.org/officeDocument/2006/relationships">
+  <p:cSld>
+    <p:spTree>
+      <p:nvGrpSpPr>
+        <p:cNvPr id="1" name=""/>
+        <p:cNvGrpSpPr/>
+        <p:nvPr/>
+      </p:nvGrpSpPr>
+      <p:grpSpPr>
+        <a:xfrm>
+          <a:off x="0" y="0"/>
+          <a:ext cx="0" cy="0"/>
+          <a:chOff x="0" y="0"/>
+          <a:chExt cx="0" cy="0"/>
+        </a:xfrm>
+      </p:grpSpPr>
+      <p:sp>
+        <p:nvSpPr>
+          <p:cNvPr id="2" name="Slide Image Placeholder 1"/>
+          <p:cNvSpPr>
+            <a:spLocks noGrp="1"/>
+          </p:cNvSpPr>
+          <p:nvPr>
+            <p:ph type="sldImg" idx="2"/>
+          </p:nvPr>
+        </p:nvSpPr>
+        <p:spPr/>
+      </p:sp>
+      <p:sp>
+        <p:nvSpPr>
+          <p:cNvPr id="3" name="Notes Placeholder 2"/>
+          <p:cNvSpPr>
+            <a:spLocks noGrp="1"/>
+          </p:cNvSpPr>
+          <p:nvPr>
+            <p:ph type="body" idx="3" sz="quarter"/>
+          </p:nvPr>
+        </p:nvSpPr>
+        <p:spPr/>
+        <p:txBody>
+          <a:bodyPr/>
+          <a:lstStyle/>
+          <a:p>
+            <a:r>
+              <a:t>If you like programming, the implement track is for you. First, print both rankings with the reference program, for the starter graph and then for the priority graph. Then write your own three scoring functions in Python. Finally, run the checker on your file. It compares your answers with the correct ones, and it feeds the edges in a scrambled order, so a missing tie-break shows up as a failure.</a:t>
+            </a:r>
+          </a:p>
+        </p:txBody>
+      </p:sp>
+      <p:sp>
+        <p:nvSpPr>
+          <p:cNvPr id="4" name="Slide Number Placeholder 3"/>
+          <p:cNvSpPr>
+            <a:spLocks noGrp="1"/>
+          </p:cNvSpPr>
+          <p:nvPr>
+            <p:ph type="sldNum" idx="5" sz="quarter"/>
+          </p:nvPr>
+        </p:nvSpPr>
+        <p:spPr/>
+      </p:sp>
+    </p:spTree>
+  </p:cSld>
+  <p:clrMapOvr>
+    <a:masterClrMapping/>
+  </p:clrMapOvr>
+</p:notes>
+</file>
+
+<file path=ppt/notesSlides/notesSlide17.xml><?xml version="1.0" encoding="utf-8"?>
+<p:notes xmlns:a="http://schemas.openxmlformats.org/drawingml/2006/main" xmlns:p="http://schemas.openxmlformats.org/presentationml/2006/main" xmlns:r="http://schemas.openxmlformats.org/officeDocument/2006/relationships">
+  <p:cSld>
+    <p:spTree>
+      <p:nvGrpSpPr>
+        <p:cNvPr id="1" name=""/>
+        <p:cNvGrpSpPr/>
+        <p:nvPr/>
+      </p:nvGrpSpPr>
+      <p:grpSpPr>
+        <a:xfrm>
+          <a:off x="0" y="0"/>
+          <a:ext cx="0" cy="0"/>
+          <a:chOff x="0" y="0"/>
+          <a:chExt cx="0" cy="0"/>
+        </a:xfrm>
+      </p:grpSpPr>
+      <p:sp>
+        <p:nvSpPr>
+          <p:cNvPr id="2" name="Slide Image Placeholder 1"/>
+          <p:cNvSpPr>
+            <a:spLocks noGrp="1"/>
+          </p:cNvSpPr>
+          <p:nvPr>
+            <p:ph type="sldImg" idx="2"/>
+          </p:nvPr>
+        </p:nvSpPr>
+        <p:spPr/>
+      </p:sp>
+      <p:sp>
+        <p:nvSpPr>
+          <p:cNvPr id="3" name="Notes Placeholder 2"/>
+          <p:cNvSpPr>
+            <a:spLocks noGrp="1"/>
+          </p:cNvSpPr>
+          <p:nvPr>
+            <p:ph type="body" idx="3" sz="quarter"/>
+          </p:nvPr>
+        </p:nvSpPr>
+        <p:spPr/>
+        <p:txBody>
+          <a:bodyPr/>
+          <a:lstStyle/>
+          <a:p>
+            <a:r>
+              <a:t>Watch out for four common mistakes. Counting an edge twice, once from each end. Adding the stronger link instead of the weaker one, which makes every pair look close. Forgetting the tie-break, so A–B and D–E swap places from one run to the next. And counting big shared nets at full weight, which glues unrelated cells together.</a:t>
+            </a:r>
+          </a:p>
+        </p:txBody>
+      </p:sp>
+      <p:sp>
+        <p:nvSpPr>
+          <p:cNvPr id="4" name="Slide Number Placeholder 3"/>
+          <p:cNvSpPr>
+            <a:spLocks noGrp="1"/>
+          </p:cNvSpPr>
+          <p:nvPr>
+            <p:ph type="sldNum" idx="5" sz="quarter"/>
+          </p:nvPr>
+        </p:nvSpPr>
+        <p:spPr/>
+      </p:sp>
+    </p:spTree>
+  </p:cSld>
+  <p:clrMapOvr>
+    <a:masterClrMapping/>
+  </p:clrMapOvr>
+</p:notes>
+</file>
+
+<file path=ppt/notesSlides/notesSlide18.xml><?xml version="1.0" encoding="utf-8"?>
+<p:notes xmlns:a="http://schemas.openxmlformats.org/drawingml/2006/main" xmlns:p="http://schemas.openxmlformats.org/presentationml/2006/main" xmlns:r="http://schemas.openxmlformats.org/officeDocument/2006/relationships">
+  <p:cSld>
+    <p:spTree>
+      <p:nvGrpSpPr>
+        <p:cNvPr id="1" name=""/>
+        <p:cNvGrpSpPr/>
+        <p:nvPr/>
+      </p:nvGrpSpPr>
+      <p:grpSpPr>
+        <a:xfrm>
+          <a:off x="0" y="0"/>
+          <a:ext cx="0" cy="0"/>
+          <a:chOff x="0" y="0"/>
+          <a:chExt cx="0" cy="0"/>
+        </a:xfrm>
+      </p:grpSpPr>
+      <p:sp>
+        <p:nvSpPr>
+          <p:cNvPr id="2" name="Slide Image Placeholder 1"/>
+          <p:cNvSpPr>
+            <a:spLocks noGrp="1"/>
+          </p:cNvSpPr>
+          <p:nvPr>
+            <p:ph type="sldImg" idx="2"/>
+          </p:nvPr>
+        </p:nvSpPr>
+        <p:spPr/>
+      </p:sp>
+      <p:sp>
+        <p:nvSpPr>
+          <p:cNvPr id="3" name="Notes Placeholder 2"/>
+          <p:cNvSpPr>
+            <a:spLocks noGrp="1"/>
+          </p:cNvSpPr>
+          <p:nvPr>
+            <p:ph type="body" idx="3" sz="quarter"/>
+          </p:nvPr>
+        </p:nvSpPr>
+        <p:spPr/>
+        <p:txBody>
+          <a:bodyPr/>
+          <a:lstStyle/>
+          <a:p>
+            <a:r>
+              <a:t>Recipe one, edge weight: look only at the direct wire. Recipe two, shared neighbors: add the help of common friends. Recipe three, pin count: big shared nets count less than private ones. Ties are broken alphabetically, so results never change between runs. Different recipes can choose a different first merge. Choosing the recipe is a design decision, not a detail.</a:t>
+            </a:r>
+          </a:p>
+        </p:txBody>
+      </p:sp>
+      <p:sp>
+        <p:nvSpPr>
+          <p:cNvPr id="4" name="Slide Number Placeholder 3"/>
+          <p:cNvSpPr>
+            <a:spLocks noGrp="1"/>
+          </p:cNvSpPr>
+          <p:nvPr>
+            <p:ph type="sldNum" idx="5" sz="quarter"/>
+          </p:nvPr>
+        </p:nvSpPr>
+        <p:spPr/>
+      </p:sp>
+    </p:spTree>
+  </p:cSld>
+  <p:clrMapOvr>
+    <a:masterClrMapping/>
+  </p:clrMapOvr>
+</p:notes>
+</file>
+
+<file path=ppt/notesSlides/notesSlide19.xml><?xml version="1.0" encoding="utf-8"?>
+<p:notes xmlns:a="http://schemas.openxmlformats.org/drawingml/2006/main" xmlns:p="http://schemas.openxmlformats.org/presentationml/2006/main" xmlns:r="http://schemas.openxmlformats.org/officeDocument/2006/relationships">
+  <p:cSld>
+    <p:spTree>
+      <p:nvGrpSpPr>
+        <p:cNvPr id="1" name=""/>
+        <p:cNvGrpSpPr/>
+        <p:nvPr/>
+      </p:nvGrpSpPr>
+      <p:grpSpPr>
+        <a:xfrm>
+          <a:off x="0" y="0"/>
+          <a:ext cx="0" cy="0"/>
+          <a:chOff x="0" y="0"/>
+          <a:chExt cx="0" cy="0"/>
+        </a:xfrm>
+      </p:grpSpPr>
+      <p:sp>
+        <p:nvSpPr>
+          <p:cNvPr id="2" name="Slide Image Placeholder 1"/>
+          <p:cNvSpPr>
+            <a:spLocks noGrp="1"/>
+          </p:cNvSpPr>
+          <p:nvPr>
+            <p:ph type="sldImg" idx="2"/>
+          </p:nvPr>
+        </p:nvSpPr>
+        <p:spPr/>
+      </p:sp>
+      <p:sp>
+        <p:nvSpPr>
+          <p:cNvPr id="3" name="Notes Placeholder 2"/>
+          <p:cNvSpPr>
+            <a:spLocks noGrp="1"/>
+          </p:cNvSpPr>
+          <p:nvPr>
+            <p:ph type="body" idx="3" sz="quarter"/>
+          </p:nvPr>
+        </p:nvSpPr>
+        <p:spPr/>
+        <p:txBody>
+          <a:bodyPr/>
+          <a:lstStyle/>
+          <a:p>
+            <a:r>
+              <a:t>Try the browser lab challenges, or write the three recipes yourself and pass the checker. Then explain two things in your own words. First, why does A–C climb with recipe two? Second, why does the priority graph change its first merge? Take the short quiz, then move on to greedy pair merge. There, these scores become the rule for merging.</a:t>
             </a:r>
           </a:p>
         </p:txBody>
@@ -938,7 +1293,7 @@
           <a:lstStyle/>
           <a:p>
             <a:r>
-              <a:t>Five cells A through E with edge weights. Heavy edges A–B and D–E both weigh five; the bridge through C is weaker. Affinity will decide which pairs want to cluster first.</a:t>
+              <a:t>A chip contains cells, the small building blocks of the circuit. Cells talk to each other through wires. We draw each cell as a dot, called a node. A line between two dots is an edge: it means the two cells are wired together. The number on an edge is its weight: how many wires join the pair. So A–B has weight five: five wires connect A and B. This drawing is called a graph, and it's the map every algorithm in this course works on.</a:t>
             </a:r>
           </a:p>
         </p:txBody>
@@ -1008,7 +1363,7 @@
           <a:lstStyle/>
           <a:p>
             <a:r>
-              <a:t>Pure edge-weight affinity just sorts existing edges. A–B and D–E tie at five; tie-break puts A–B first. That ranking is the simplest merge priority.</a:t>
+              <a:t>Cells that exchange many signals should sit close together. Short wires make the chip faster and save energy. Grouping close cells is called clustering, and each group is a cluster. Think of a seating plan: friends who chat a lot sit at the same table. Here, A, B and C form one group, and D and E form another. Only the red edges cross between the groups, and we want as few of those as possible.</a:t>
             </a:r>
           </a:p>
         </p:txBody>
@@ -1078,7 +1433,7 @@
           <a:lstStyle/>
           <a:p>
             <a:r>
-              <a:t>A and B already share edge weight five. They also share neighbor C. Shared-neighbor affinity adds the minimum of those spokes—one—so A–B rises to six.</a:t>
+              <a:t>Affinity is a score for each pair of cells. A high score means these two should be in the same group. A low score means they can be apart. Clustering algorithms merge the pair with the highest score first. So the recipe for the score decides everything that follows. This lab compares three recipes on the same small example.</a:t>
             </a:r>
           </a:p>
         </p:txBody>
@@ -1148,7 +1503,7 @@
           <a:lstStyle/>
           <a:p>
             <a:r>
-              <a:t>Under shared-neighbor scoring, A–B and D–E lead at six. Weak edge A–C jumps to five because of B. Non-edges like B–D can appear from shared support alone.</a:t>
+              <a:t>Here is our example for the whole lab: five cells, A to E. The heavy edges are A–B and D–E, with weight five each. C sits in the middle, with thinner links to the others. Keep this picture in mind: we're going to give a score to every pair of cells in it.</a:t>
             </a:r>
           </a:p>
         </p:txBody>
@@ -1218,7 +1573,7 @@
           <a:lstStyle/>
           <a:p>
             <a:r>
-              <a:t>Affinity is the objective’s local preference: which cells belong together before global constraints. Bad affinity means bad merges, and harder refinement later.</a:t>
+              <a:t>Recipe one is the simplest. The score of a pair is just the weight of the edge between them. Then we sort the pairs from highest to lowest, like a leaderboard. A–B and D–E are tied at five. When two scores are equal, we break the tie in alphabetical order, so A–B comes first. A fixed tie-break matters: it makes the computer give the same answer every single time.</a:t>
             </a:r>
           </a:p>
         </p:txBody>
@@ -1288,7 +1643,7 @@
           <a:lstStyle/>
           <a:p>
             <a:r>
-              <a:t>Here is the shared-neighbor score as code. First, every existing edge adds its weight to its pair. Then, for every pair of nodes, look at each neighbor they have in common, and add the smaller of the two connecting weights. If a pair ends up with a score above zero, keep it. Finally, sort by score, highest first, and break ties alphabetically, so your list comes out the same every time.</a:t>
+              <a:t>Recipe two adds an idea from everyday life: friends of friends. If two people share a close friend, they're probably close too. A and B are directly linked with weight five. They also share a neighbor: C. We add the weaker of the two links through C, which is one, so A–B rises to six. Why the weaker link? Because a chain is only as strong as its weakest link.</a:t>
             </a:r>
           </a:p>
         </p:txBody>
@@ -1358,7 +1713,7 @@
           <a:lstStyle/>
           <a:p>
             <a:r>
-              <a:t>Under shared-neighbor scoring the starter graph produces ten pairs, not six. Four of them have no edge at all. B and D both connect to C, so B–D scores the smaller spoke, two. A–D, A–E and B–E each pick up one through C. These pairs aren't mistakes: they say two cells are close even without a direct wire. A pair is only left out when its score would be zero.</a:t>
+              <a:t>With recipe two, A–B and D–E still lead, now at six. But look at A–C: on its own it was a weak edge of one, and now it jumps to five, thanks to B. Even pairs with no edge at all, like B–D, get a score, because they share a neighbor.</a:t>
             </a:r>
           </a:p>
         </p:txBody>
@@ -1428,7 +1783,7 @@
           <a:lstStyle/>
           <a:p>
             <a:r>
-              <a:t>Here's why the choice matters. Take a tight triangle P, Q, R, with every edge at weight four, and a lone pair X–Y at weight five. Edge weight picks X–Y first, because five beats four. Shared-neighbor scoring gives P–Q four plus four through R: eight. X–Y has no common neighbor, so it stays at five. Same graph, same merge engine, different first merge.</a:t>
+              <a:t>EDA stands for electronic design automation: the software that designs chips. In EDA, affinity is the local preference: which cells belong together, before any rule about the whole chip. Bad affinity means bad merges, and fixing them later is much harder.</a:t>
             </a:r>
           </a:p>
         </p:txBody>
@@ -4490,7 +4845,7 @@
                 </a:solidFill>
                 <a:latin typeface="Calibri"/>
               </a:rPr>
-              <a:t>Before you merge cells or coarsen a netlist, you need a score that says these two should stay together</a:t>
+              <a:t>Which parts of a chip belong together?</a:t>
             </a:r>
           </a:p>
         </p:txBody>
@@ -4586,7 +4941,7 @@
                 </a:solidFill>
                 <a:latin typeface="Calibri"/>
               </a:rPr>
-              <a:t>Same graph, different first merge</a:t>
+              <a:t>Worked example: the score of A–C</a:t>
             </a:r>
           </a:p>
         </p:txBody>
@@ -4631,7 +4986,7 @@
                 </a:solidFill>
                 <a:latin typeface="Calibri"/>
               </a:rPr>
-              <a:t>Here's why the choice matters</a:t>
+              <a:t>Let's compute one score together, step by step</a:t>
             </a:r>
           </a:p>
           <a:p>
@@ -4653,7 +5008,7 @@
                 </a:solidFill>
                 <a:latin typeface="Calibri"/>
               </a:rPr>
-              <a:t>Take a tight triangle P, Q, R, with every edge at weight four</a:t>
+              <a:t>Step one: the direct edge A–C has weight one</a:t>
             </a:r>
           </a:p>
           <a:p>
@@ -4675,7 +5030,7 @@
                 </a:solidFill>
                 <a:latin typeface="Calibri"/>
               </a:rPr>
-              <a:t>Edge weight picks X–Y first, because five beats four</a:t>
+              <a:t>Step two: A and C have one neighbor in common, B</a:t>
             </a:r>
           </a:p>
           <a:p>
@@ -4697,7 +5052,7 @@
                 </a:solidFill>
                 <a:latin typeface="Calibri"/>
               </a:rPr>
-              <a:t>Shared-neighbor scoring gives P–Q four plus four through R: eight</a:t>
+              <a:t>The links through B weigh five and four, so we keep the smaller one: four</a:t>
             </a:r>
           </a:p>
           <a:p>
@@ -4719,7 +5074,7 @@
                 </a:solidFill>
                 <a:latin typeface="Calibri"/>
               </a:rPr>
-              <a:t>X–Y has no common neighbor, so it stays at five</a:t>
+              <a:t>Step three: add them up, one plus four makes five</a:t>
             </a:r>
           </a:p>
           <a:p>
@@ -4741,14 +5096,14 @@
                 </a:solidFill>
                 <a:latin typeface="Calibri"/>
               </a:rPr>
-              <a:t>Same graph, same merge engine, different first merge</a:t>
+              <a:t>A–C was weak alone, but becomes strong once its shared friend counts</a:t>
             </a:r>
           </a:p>
         </p:txBody>
       </p:sp>
       <p:pic>
         <p:nvPicPr>
-          <p:cNvPr id="4" name="Picture 3" descr="priority-graph.png"/>
+          <p:cNvPr id="4" name="Picture 3" descr="worked-ac.png"/>
           <p:cNvPicPr>
             <a:picLocks noChangeAspect="1"/>
           </p:cNvPicPr>
@@ -4763,7 +5118,7 @@
         <p:spPr>
           <a:xfrm>
             <a:off x="6172200" y="1234440"/>
-            <a:ext cx="3548417" cy="4754879"/>
+            <a:ext cx="5131742" cy="4754880"/>
           </a:xfrm>
           <a:prstGeom prst="rect">
             <a:avLst/>
@@ -4861,7 +5216,7 @@
                 </a:solidFill>
                 <a:latin typeface="Calibri"/>
               </a:rPr>
-              <a:t>Nets with many pins</a:t>
+              <a:t>Ten pairs, not six</a:t>
             </a:r>
           </a:p>
         </p:txBody>
@@ -4906,7 +5261,7 @@
                 </a:solidFill>
                 <a:latin typeface="Calibri"/>
               </a:rPr>
-              <a:t>Real netlists aren't simple edges</a:t>
+              <a:t>With recipe two, our small graph gives ten pairs instead of six</a:t>
             </a:r>
           </a:p>
           <a:p>
@@ -4928,7 +5283,7 @@
                 </a:solidFill>
                 <a:latin typeface="Calibri"/>
               </a:rPr>
-              <a:t>One net can connect many cells, like a reset or an enable line</a:t>
+              <a:t>Four of them have no wire at all between them</a:t>
             </a:r>
           </a:p>
           <a:p>
@@ -4950,7 +5305,7 @@
                 </a:solidFill>
                 <a:latin typeface="Calibri"/>
               </a:rPr>
-              <a:t>If you count every shared net at full weight</a:t>
+              <a:t>For example, B and D are not wired together, but both are wired to C</a:t>
             </a:r>
           </a:p>
           <a:p>
@@ -4972,7 +5327,7 @@
                 </a:solidFill>
                 <a:latin typeface="Calibri"/>
               </a:rPr>
-              <a:t>Pin-count scoring fixes this</a:t>
+              <a:t>So B–D gets the weaker of those two links: two</a:t>
             </a:r>
           </a:p>
           <a:p>
@@ -4994,7 +5349,7 @@
                 </a:solidFill>
                 <a:latin typeface="Calibri"/>
               </a:rPr>
-              <a:t>Each net splits its weight across its pins: weight divided by pins minus one</a:t>
+              <a:t>It's like two people who have never met but share a best friend</a:t>
             </a:r>
           </a:p>
           <a:p>
@@ -5016,7 +5371,7 @@
                 </a:solidFill>
                 <a:latin typeface="Calibri"/>
               </a:rPr>
-              <a:t>A two-pin net counts fully</a:t>
+              <a:t>Only pairs whose score would be zero are left out</a:t>
             </a:r>
           </a:p>
         </p:txBody>
@@ -5112,7 +5467,7 @@
                 </a:solidFill>
                 <a:latin typeface="Calibri"/>
               </a:rPr>
-              <a:t>Nets with many pins — try these</a:t>
+              <a:t>Recipe two as pseudocode</a:t>
             </a:r>
           </a:p>
         </p:txBody>
@@ -5125,15 +5480,13 @@
         </p:nvSpPr>
         <p:spPr>
           <a:xfrm>
-            <a:off x="548640" y="1143000"/>
-            <a:ext cx="11064240" cy="5029200"/>
+            <a:off x="548640" y="1234440"/>
+            <a:ext cx="11064240" cy="4937760"/>
           </a:xfrm>
           <a:prstGeom prst="rect">
             <a:avLst/>
           </a:prstGeom>
-          <a:solidFill>
-            <a:srgbClr val="F4F4F4"/>
-          </a:solidFill>
+          <a:noFill/>
         </p:spPr>
         <p:txBody>
           <a:bodyPr wrap="square">
@@ -5141,117 +5494,135 @@
           </a:bodyPr>
           <a:lstStyle/>
           <a:p>
-            <a:pPr>
-              <a:lnSpc>
-                <a:spcPts val="2200"/>
-              </a:lnSpc>
+            <a:pPr lvl="0" marL="457200" indent="-228600">
+              <a:buFont typeface="Calibri"/>
               <a:spcAft>
-                <a:spcPts val="400"/>
+                <a:spcPts val="1000"/>
               </a:spcAft>
+              <a:buSzPct val="100000"/>
+              <a:buChar char="•"/>
+              <a:lnSpc>
+                <a:spcPts val="2200"/>
+              </a:lnSpc>
             </a:pPr>
             <a:r>
               <a:rPr sz="2000" b="0">
                 <a:solidFill>
                   <a:srgbClr val="333333"/>
                 </a:solidFill>
-                <a:latin typeface="Consolas"/>
-              </a:rPr>
-              <a:t>tiny netlist: en {A,B,C,D,E}, rst {A,B,C,D,E}, n1 {E,F}</a:t>
-            </a:r>
-          </a:p>
-          <a:p>
-            <a:pPr>
-              <a:lnSpc>
-                <a:spcPts val="2200"/>
-              </a:lnSpc>
+                <a:latin typeface="Calibri"/>
+              </a:rPr>
+              <a:t>Here is recipe two written as steps a computer can follow</a:t>
+            </a:r>
+          </a:p>
+          <a:p>
+            <a:pPr lvl="0" marL="457200" indent="-228600">
+              <a:buFont typeface="Calibri"/>
               <a:spcAft>
-                <a:spcPts val="400"/>
+                <a:spcPts val="1000"/>
               </a:spcAft>
+              <a:buSzPct val="100000"/>
+              <a:buChar char="•"/>
+              <a:lnSpc>
+                <a:spcPts val="2200"/>
+              </a:lnSpc>
             </a:pPr>
             <a:r>
               <a:rPr sz="2000" b="0">
                 <a:solidFill>
                   <a:srgbClr val="333333"/>
                 </a:solidFill>
-                <a:latin typeface="Consolas"/>
-              </a:rPr>
-              <a:t/>
-            </a:r>
-          </a:p>
-          <a:p>
-            <a:pPr>
-              <a:lnSpc>
-                <a:spcPts val="2200"/>
-              </a:lnSpc>
+                <a:latin typeface="Calibri"/>
+              </a:rPr>
+              <a:t>First, every edge adds its weight to its own pair</a:t>
+            </a:r>
+          </a:p>
+          <a:p>
+            <a:pPr lvl="0" marL="457200" indent="-228600">
+              <a:buFont typeface="Calibri"/>
               <a:spcAft>
-                <a:spcPts val="400"/>
+                <a:spcPts val="1000"/>
               </a:spcAft>
+              <a:buSzPct val="100000"/>
+              <a:buChar char="•"/>
+              <a:lnSpc>
+                <a:spcPts val="2200"/>
+              </a:lnSpc>
             </a:pPr>
             <a:r>
               <a:rPr sz="2000" b="0">
                 <a:solidFill>
                   <a:srgbClr val="333333"/>
                 </a:solidFill>
-                <a:latin typeface="Consolas"/>
-              </a:rPr>
-              <a:t>           raw net count     pin-count w/(|e|-1)</a:t>
-            </a:r>
-          </a:p>
-          <a:p>
-            <a:pPr>
-              <a:lnSpc>
-                <a:spcPts val="2200"/>
-              </a:lnSpc>
+                <a:latin typeface="Calibri"/>
+              </a:rPr>
+              <a:t>Next, for every pair of nodes, look at each neighbor they have in common</a:t>
+            </a:r>
+          </a:p>
+          <a:p>
+            <a:pPr lvl="0" marL="457200" indent="-228600">
+              <a:buFont typeface="Calibri"/>
               <a:spcAft>
-                <a:spcPts val="400"/>
+                <a:spcPts val="1000"/>
               </a:spcAft>
+              <a:buSzPct val="100000"/>
+              <a:buChar char="•"/>
+              <a:lnSpc>
+                <a:spcPts val="2200"/>
+              </a:lnSpc>
             </a:pPr>
             <a:r>
               <a:rPr sz="2000" b="0">
                 <a:solidFill>
                   <a:srgbClr val="333333"/>
                 </a:solidFill>
-                <a:latin typeface="Consolas"/>
-              </a:rPr>
-              <a:t>A-B        1 + 1 = 2         1/4 + 1/4 = 0.5</a:t>
-            </a:r>
-          </a:p>
-          <a:p>
-            <a:pPr>
-              <a:lnSpc>
-                <a:spcPts val="2200"/>
-              </a:lnSpc>
+                <a:latin typeface="Calibri"/>
+              </a:rPr>
+              <a:t>For each shared neighbor, add the smaller of its two links to the pair</a:t>
+            </a:r>
+          </a:p>
+          <a:p>
+            <a:pPr lvl="0" marL="457200" indent="-228600">
+              <a:buFont typeface="Calibri"/>
               <a:spcAft>
-                <a:spcPts val="400"/>
+                <a:spcPts val="1000"/>
               </a:spcAft>
+              <a:buSzPct val="100000"/>
+              <a:buChar char="•"/>
+              <a:lnSpc>
+                <a:spcPts val="2200"/>
+              </a:lnSpc>
             </a:pPr>
             <a:r>
               <a:rPr sz="2000" b="0">
                 <a:solidFill>
                   <a:srgbClr val="333333"/>
                 </a:solidFill>
-                <a:latin typeface="Consolas"/>
-              </a:rPr>
-              <a:t>E-F        1                 1/1 = 1.0</a:t>
-            </a:r>
-          </a:p>
-          <a:p>
-            <a:pPr>
-              <a:lnSpc>
-                <a:spcPts val="2200"/>
-              </a:lnSpc>
+                <a:latin typeface="Calibri"/>
+              </a:rPr>
+              <a:t>Keep every pair whose score ends up above zero</a:t>
+            </a:r>
+          </a:p>
+          <a:p>
+            <a:pPr lvl="0" marL="457200" indent="-228600">
+              <a:buFont typeface="Calibri"/>
               <a:spcAft>
-                <a:spcPts val="400"/>
+                <a:spcPts val="1000"/>
               </a:spcAft>
+              <a:buSzPct val="100000"/>
+              <a:buChar char="•"/>
+              <a:lnSpc>
+                <a:spcPts val="2200"/>
+              </a:lnSpc>
             </a:pPr>
             <a:r>
               <a:rPr sz="2000" b="0">
                 <a:solidFill>
                   <a:srgbClr val="333333"/>
                 </a:solidFill>
-                <a:latin typeface="Consolas"/>
-              </a:rPr>
-              <a:t>first      A-B               E-F</a:t>
+                <a:latin typeface="Calibri"/>
+              </a:rPr>
+              <a:t>Finally, sort from highest to lowest score, and break ties alphabetically</a:t>
             </a:r>
           </a:p>
         </p:txBody>
@@ -5347,50 +5718,28 @@
                 </a:solidFill>
                 <a:latin typeface="Calibri"/>
               </a:rPr>
-              <a:t>Browser lab track</a:t>
-            </a:r>
-          </a:p>
-        </p:txBody>
-      </p:sp>
-      <p:pic>
-        <p:nvPicPr>
-          <p:cNvPr id="3" name="Picture 2" descr="lab-starter.png"/>
-          <p:cNvPicPr>
-            <a:picLocks noChangeAspect="1"/>
-          </p:cNvPicPr>
+              <a:t>Recipe two as pseudocode — try these</a:t>
+            </a:r>
+          </a:p>
+        </p:txBody>
+      </p:sp>
+      <p:sp>
+        <p:nvSpPr>
+          <p:cNvPr id="3" name="TextBox 2"/>
+          <p:cNvSpPr txBox="1"/>
           <p:nvPr/>
-        </p:nvPicPr>
-        <p:blipFill>
-          <a:blip r:embed="rId2"/>
-          <a:stretch>
-            <a:fillRect/>
-          </a:stretch>
-        </p:blipFill>
+        </p:nvSpPr>
         <p:spPr>
           <a:xfrm>
             <a:off x="548640" y="1143000"/>
-            <a:ext cx="6854354" cy="4572000"/>
+            <a:ext cx="11064240" cy="5029200"/>
           </a:xfrm>
           <a:prstGeom prst="rect">
             <a:avLst/>
           </a:prstGeom>
-        </p:spPr>
-      </p:pic>
-      <p:sp>
-        <p:nvSpPr>
-          <p:cNvPr id="4" name="TextBox 3"/>
-          <p:cNvSpPr txBox="1"/>
-          <p:nvPr/>
-        </p:nvSpPr>
-        <p:spPr>
-          <a:xfrm>
-            <a:off x="548640" y="5897880"/>
-            <a:ext cx="11064240" cy="411480"/>
-          </a:xfrm>
-          <a:prstGeom prst="rect">
-            <a:avLst/>
-          </a:prstGeom>
-          <a:noFill/>
+          <a:solidFill>
+            <a:srgbClr val="F4F4F4"/>
+          </a:solidFill>
         </p:spPr>
         <p:txBody>
           <a:bodyPr wrap="square">
@@ -5402,22 +5751,196 @@
               <a:lnSpc>
                 <a:spcPts val="2200"/>
               </a:lnSpc>
-            </a:pPr>
-            <a:r>
-              <a:rPr sz="1200" b="0">
+              <a:spcAft>
+                <a:spcPts val="400"/>
+              </a:spcAft>
+            </a:pPr>
+            <a:r>
+              <a:rPr sz="2000" b="0">
                 <a:solidFill>
                   <a:srgbClr val="333333"/>
                 </a:solidFill>
-                <a:latin typeface="Calibri"/>
-              </a:rPr>
-              <a:t>Browser lab starter</a:t>
-            </a:r>
-          </a:p>
-        </p:txBody>
-      </p:sp>
-      <p:sp>
-        <p:nvSpPr>
-          <p:cNvPr id="5" name="TextBox 4"/>
+                <a:latin typeface="Consolas"/>
+              </a:rPr>
+              <a:t>affinity_shared_neighbors(nodes, edges):</a:t>
+            </a:r>
+          </a:p>
+          <a:p>
+            <a:pPr>
+              <a:lnSpc>
+                <a:spcPts val="2200"/>
+              </a:lnSpc>
+              <a:spcAft>
+                <a:spcPts val="400"/>
+              </a:spcAft>
+            </a:pPr>
+            <a:r>
+              <a:rPr sz="2000" b="0">
+                <a:solidFill>
+                  <a:srgbClr val="333333"/>
+                </a:solidFill>
+                <a:latin typeface="Consolas"/>
+              </a:rPr>
+              <a:t>  score[u,v] = w(u,v) for every edge</a:t>
+            </a:r>
+          </a:p>
+          <a:p>
+            <a:pPr>
+              <a:lnSpc>
+                <a:spcPts val="2200"/>
+              </a:lnSpc>
+              <a:spcAft>
+                <a:spcPts val="400"/>
+              </a:spcAft>
+            </a:pPr>
+            <a:r>
+              <a:rPr sz="2000" b="0">
+                <a:solidFill>
+                  <a:srgbClr val="333333"/>
+                </a:solidFill>
+                <a:latin typeface="Consolas"/>
+              </a:rPr>
+              <a:t>  for every pair (u, v) of nodes:</a:t>
+            </a:r>
+          </a:p>
+          <a:p>
+            <a:pPr>
+              <a:lnSpc>
+                <a:spcPts val="2200"/>
+              </a:lnSpc>
+              <a:spcAft>
+                <a:spcPts val="400"/>
+              </a:spcAft>
+            </a:pPr>
+            <a:r>
+              <a:rPr sz="2000" b="0">
+                <a:solidFill>
+                  <a:srgbClr val="333333"/>
+                </a:solidFill>
+                <a:latin typeface="Consolas"/>
+              </a:rPr>
+              <a:t>    s = 0</a:t>
+            </a:r>
+          </a:p>
+          <a:p>
+            <a:pPr>
+              <a:lnSpc>
+                <a:spcPts val="2200"/>
+              </a:lnSpc>
+              <a:spcAft>
+                <a:spcPts val="400"/>
+              </a:spcAft>
+            </a:pPr>
+            <a:r>
+              <a:rPr sz="2000" b="0">
+                <a:solidFill>
+                  <a:srgbClr val="333333"/>
+                </a:solidFill>
+                <a:latin typeface="Consolas"/>
+              </a:rPr>
+              <a:t>    for x in neighbors(u), x != v:</a:t>
+            </a:r>
+          </a:p>
+          <a:p>
+            <a:pPr>
+              <a:lnSpc>
+                <a:spcPts val="2200"/>
+              </a:lnSpc>
+              <a:spcAft>
+                <a:spcPts val="400"/>
+              </a:spcAft>
+            </a:pPr>
+            <a:r>
+              <a:rPr sz="2000" b="0">
+                <a:solidFill>
+                  <a:srgbClr val="333333"/>
+                </a:solidFill>
+                <a:latin typeface="Consolas"/>
+              </a:rPr>
+              <a:t>      if x in neighbors(v):</a:t>
+            </a:r>
+          </a:p>
+          <a:p>
+            <a:pPr>
+              <a:lnSpc>
+                <a:spcPts val="2200"/>
+              </a:lnSpc>
+              <a:spcAft>
+                <a:spcPts val="400"/>
+              </a:spcAft>
+            </a:pPr>
+            <a:r>
+              <a:rPr sz="2000" b="0">
+                <a:solidFill>
+                  <a:srgbClr val="333333"/>
+                </a:solidFill>
+                <a:latin typeface="Consolas"/>
+              </a:rPr>
+              <a:t>        s += min(w(u,x), w(v,x))</a:t>
+            </a:r>
+          </a:p>
+          <a:p>
+            <a:pPr>
+              <a:lnSpc>
+                <a:spcPts val="2200"/>
+              </a:lnSpc>
+              <a:spcAft>
+                <a:spcPts val="400"/>
+              </a:spcAft>
+            </a:pPr>
+            <a:r>
+              <a:rPr sz="2000" b="0">
+                <a:solidFill>
+                  <a:srgbClr val="333333"/>
+                </a:solidFill>
+                <a:latin typeface="Consolas"/>
+              </a:rPr>
+              <a:t>    if s &gt; 0 or (u,v) has an edge:</a:t>
+            </a:r>
+          </a:p>
+          <a:p>
+            <a:pPr>
+              <a:lnSpc>
+                <a:spcPts val="2200"/>
+              </a:lnSpc>
+              <a:spcAft>
+                <a:spcPts val="400"/>
+              </a:spcAft>
+            </a:pPr>
+            <a:r>
+              <a:rPr sz="2000" b="0">
+                <a:solidFill>
+                  <a:srgbClr val="333333"/>
+                </a:solidFill>
+                <a:latin typeface="Consolas"/>
+              </a:rPr>
+              <a:t>      score[u,v] += s</a:t>
+            </a:r>
+          </a:p>
+          <a:p>
+            <a:pPr>
+              <a:lnSpc>
+                <a:spcPts val="2200"/>
+              </a:lnSpc>
+              <a:spcAft>
+                <a:spcPts val="400"/>
+              </a:spcAft>
+            </a:pPr>
+            <a:r>
+              <a:rPr sz="2000" b="0">
+                <a:solidFill>
+                  <a:srgbClr val="333333"/>
+                </a:solidFill>
+                <a:latin typeface="Consolas"/>
+              </a:rPr>
+              <a:t>  sort by score (high first), then u, then v</a:t>
+            </a:r>
+          </a:p>
+        </p:txBody>
+      </p:sp>
+      <p:sp>
+        <p:nvSpPr>
+          <p:cNvPr id="4" name="TextBox 3"/>
           <p:cNvSpPr txBox="1"/>
           <p:nvPr/>
         </p:nvSpPr>
@@ -5506,14 +6029,169 @@
                 </a:solidFill>
                 <a:latin typeface="Calibri"/>
               </a:rPr>
-              <a:t>Implement track</a:t>
+              <a:t>Same graph, different first merge</a:t>
+            </a:r>
+          </a:p>
+        </p:txBody>
+      </p:sp>
+      <p:sp>
+        <p:nvSpPr>
+          <p:cNvPr id="3" name="TextBox 2"/>
+          <p:cNvSpPr txBox="1"/>
+          <p:nvPr/>
+        </p:nvSpPr>
+        <p:spPr>
+          <a:xfrm>
+            <a:off x="548640" y="1234440"/>
+            <a:ext cx="5303520" cy="4754880"/>
+          </a:xfrm>
+          <a:prstGeom prst="rect">
+            <a:avLst/>
+          </a:prstGeom>
+          <a:noFill/>
+        </p:spPr>
+        <p:txBody>
+          <a:bodyPr wrap="square">
+            <a:noAutofit/>
+          </a:bodyPr>
+          <a:lstStyle/>
+          <a:p>
+            <a:pPr lvl="0" marL="457200" indent="-228600">
+              <a:buFont typeface="Calibri"/>
+              <a:spcAft>
+                <a:spcPts val="1000"/>
+              </a:spcAft>
+              <a:buSzPct val="100000"/>
+              <a:buChar char="•"/>
+              <a:lnSpc>
+                <a:spcPts val="2200"/>
+              </a:lnSpc>
+            </a:pPr>
+            <a:r>
+              <a:rPr sz="2000" b="0">
+                <a:solidFill>
+                  <a:srgbClr val="333333"/>
+                </a:solidFill>
+                <a:latin typeface="Calibri"/>
+              </a:rPr>
+              <a:t>Here's a second example that shows why the recipe matters</a:t>
+            </a:r>
+          </a:p>
+          <a:p>
+            <a:pPr lvl="0" marL="457200" indent="-228600">
+              <a:buFont typeface="Calibri"/>
+              <a:spcAft>
+                <a:spcPts val="1000"/>
+              </a:spcAft>
+              <a:buSzPct val="100000"/>
+              <a:buChar char="•"/>
+              <a:lnSpc>
+                <a:spcPts val="2200"/>
+              </a:lnSpc>
+            </a:pPr>
+            <a:r>
+              <a:rPr sz="2000" b="0">
+                <a:solidFill>
+                  <a:srgbClr val="333333"/>
+                </a:solidFill>
+                <a:latin typeface="Calibri"/>
+              </a:rPr>
+              <a:t>Take a tight triangle P, Q, R, with every edge at weight four</a:t>
+            </a:r>
+          </a:p>
+          <a:p>
+            <a:pPr lvl="0" marL="457200" indent="-228600">
+              <a:buFont typeface="Calibri"/>
+              <a:spcAft>
+                <a:spcPts val="1000"/>
+              </a:spcAft>
+              <a:buSzPct val="100000"/>
+              <a:buChar char="•"/>
+              <a:lnSpc>
+                <a:spcPts val="2200"/>
+              </a:lnSpc>
+            </a:pPr>
+            <a:r>
+              <a:rPr sz="2000" b="0">
+                <a:solidFill>
+                  <a:srgbClr val="333333"/>
+                </a:solidFill>
+                <a:latin typeface="Calibri"/>
+              </a:rPr>
+              <a:t>Next to it, a lone pair X–Y has weight five</a:t>
+            </a:r>
+          </a:p>
+          <a:p>
+            <a:pPr lvl="0" marL="457200" indent="-228600">
+              <a:buFont typeface="Calibri"/>
+              <a:spcAft>
+                <a:spcPts val="1000"/>
+              </a:spcAft>
+              <a:buSzPct val="100000"/>
+              <a:buChar char="•"/>
+              <a:lnSpc>
+                <a:spcPts val="2200"/>
+              </a:lnSpc>
+            </a:pPr>
+            <a:r>
+              <a:rPr sz="2000" b="0">
+                <a:solidFill>
+                  <a:srgbClr val="333333"/>
+                </a:solidFill>
+                <a:latin typeface="Calibri"/>
+              </a:rPr>
+              <a:t>Recipe one picks X–Y first, because five beats four</a:t>
+            </a:r>
+          </a:p>
+          <a:p>
+            <a:pPr lvl="0" marL="457200" indent="-228600">
+              <a:buFont typeface="Calibri"/>
+              <a:spcAft>
+                <a:spcPts val="1000"/>
+              </a:spcAft>
+              <a:buSzPct val="100000"/>
+              <a:buChar char="•"/>
+              <a:lnSpc>
+                <a:spcPts val="2200"/>
+              </a:lnSpc>
+            </a:pPr>
+            <a:r>
+              <a:rPr sz="2000" b="0">
+                <a:solidFill>
+                  <a:srgbClr val="333333"/>
+                </a:solidFill>
+                <a:latin typeface="Calibri"/>
+              </a:rPr>
+              <a:t>Recipe two gives P–Q four, plus four through R: eight, so P–Q goes first</a:t>
+            </a:r>
+          </a:p>
+          <a:p>
+            <a:pPr lvl="0" marL="457200" indent="-228600">
+              <a:buFont typeface="Calibri"/>
+              <a:spcAft>
+                <a:spcPts val="1000"/>
+              </a:spcAft>
+              <a:buSzPct val="100000"/>
+              <a:buChar char="•"/>
+              <a:lnSpc>
+                <a:spcPts val="2200"/>
+              </a:lnSpc>
+            </a:pPr>
+            <a:r>
+              <a:rPr sz="2000" b="0">
+                <a:solidFill>
+                  <a:srgbClr val="333333"/>
+                </a:solidFill>
+                <a:latin typeface="Calibri"/>
+              </a:rPr>
+              <a:t>Same graph, same merge rule, but a different first merge</a:t>
             </a:r>
           </a:p>
         </p:txBody>
       </p:sp>
       <p:pic>
         <p:nvPicPr>
-          <p:cNvPr id="3" name="Picture 2" descr="real-shell.png"/>
+          <p:cNvPr id="4" name="Picture 3" descr="priority-graph.png"/>
           <p:cNvPicPr>
             <a:picLocks noChangeAspect="1"/>
           </p:cNvPicPr>
@@ -5527,53 +6205,14 @@
         </p:blipFill>
         <p:spPr>
           <a:xfrm>
-            <a:off x="548640" y="1143000"/>
-            <a:ext cx="9160625" cy="4572000"/>
+            <a:off x="6172200" y="1234440"/>
+            <a:ext cx="3548417" cy="4754879"/>
           </a:xfrm>
           <a:prstGeom prst="rect">
             <a:avLst/>
           </a:prstGeom>
         </p:spPr>
       </p:pic>
-      <p:sp>
-        <p:nvSpPr>
-          <p:cNvPr id="4" name="TextBox 3"/>
-          <p:cNvSpPr txBox="1"/>
-          <p:nvPr/>
-        </p:nvSpPr>
-        <p:spPr>
-          <a:xfrm>
-            <a:off x="548640" y="5897880"/>
-            <a:ext cx="11064240" cy="411480"/>
-          </a:xfrm>
-          <a:prstGeom prst="rect">
-            <a:avLst/>
-          </a:prstGeom>
-          <a:noFill/>
-        </p:spPr>
-        <p:txBody>
-          <a:bodyPr wrap="square">
-            <a:noAutofit/>
-          </a:bodyPr>
-          <a:lstStyle/>
-          <a:p>
-            <a:pPr>
-              <a:lnSpc>
-                <a:spcPts val="2200"/>
-              </a:lnSpc>
-            </a:pPr>
-            <a:r>
-              <a:rPr sz="1200" b="0">
-                <a:solidFill>
-                  <a:srgbClr val="333333"/>
-                </a:solidFill>
-                <a:latin typeface="Calibri"/>
-              </a:rPr>
-              <a:t>Real shell session</a:t>
-            </a:r>
-          </a:p>
-        </p:txBody>
-      </p:sp>
       <p:sp>
         <p:nvSpPr>
           <p:cNvPr id="5" name="TextBox 4"/>
@@ -5665,7 +6304,7 @@
                 </a:solidFill>
                 <a:latin typeface="Calibri"/>
               </a:rPr>
-              <a:t>Implement track — try these</a:t>
+              <a:t>Nets with many pins</a:t>
             </a:r>
           </a:p>
         </p:txBody>
@@ -5678,15 +6317,13 @@
         </p:nvSpPr>
         <p:spPr>
           <a:xfrm>
-            <a:off x="548640" y="1143000"/>
-            <a:ext cx="11064240" cy="5029200"/>
+            <a:off x="548640" y="1234440"/>
+            <a:ext cx="5303520" cy="4754880"/>
           </a:xfrm>
           <a:prstGeom prst="rect">
             <a:avLst/>
           </a:prstGeom>
-          <a:solidFill>
-            <a:srgbClr val="F4F4F4"/>
-          </a:solidFill>
+          <a:noFill/>
         </p:spPr>
         <p:txBody>
           <a:bodyPr wrap="square">
@@ -5694,219 +6331,166 @@
           </a:bodyPr>
           <a:lstStyle/>
           <a:p>
-            <a:pPr>
-              <a:lnSpc>
-                <a:spcPts val="2200"/>
-              </a:lnSpc>
+            <a:pPr lvl="0" marL="457200" indent="-228600">
+              <a:buFont typeface="Calibri"/>
               <a:spcAft>
-                <a:spcPts val="400"/>
+                <a:spcPts val="1000"/>
               </a:spcAft>
+              <a:buSzPct val="100000"/>
+              <a:buChar char="•"/>
+              <a:lnSpc>
+                <a:spcPts val="2200"/>
+              </a:lnSpc>
             </a:pPr>
             <a:r>
               <a:rPr sz="2000" b="0">
                 <a:solidFill>
                   <a:srgbClr val="333333"/>
                 </a:solidFill>
-                <a:latin typeface="Consolas"/>
-              </a:rPr>
-              <a:t># point Python at the shared helpers</a:t>
-            </a:r>
-          </a:p>
-          <a:p>
-            <a:pPr>
-              <a:lnSpc>
-                <a:spcPts val="2200"/>
-              </a:lnSpc>
+                <a:latin typeface="Calibri"/>
+              </a:rPr>
+              <a:t>On a real chip, one wire can connect many cells at once</a:t>
+            </a:r>
+          </a:p>
+          <a:p>
+            <a:pPr lvl="0" marL="457200" indent="-228600">
+              <a:buFont typeface="Calibri"/>
               <a:spcAft>
-                <a:spcPts val="400"/>
+                <a:spcPts val="1000"/>
               </a:spcAft>
+              <a:buSzPct val="100000"/>
+              <a:buChar char="•"/>
+              <a:lnSpc>
+                <a:spcPts val="2200"/>
+              </a:lnSpc>
             </a:pPr>
             <a:r>
               <a:rPr sz="2000" b="0">
                 <a:solidFill>
                   <a:srgbClr val="333333"/>
                 </a:solidFill>
-                <a:latin typeface="Consolas"/>
-              </a:rPr>
-              <a:t>export PYTHONPATH=../common</a:t>
-            </a:r>
-          </a:p>
-          <a:p>
-            <a:pPr>
-              <a:lnSpc>
-                <a:spcPts val="2200"/>
-              </a:lnSpc>
+                <a:latin typeface="Calibri"/>
+              </a:rPr>
+              <a:t>Such a shared wire is called a net, and each cell it touches is a pin</a:t>
+            </a:r>
+          </a:p>
+          <a:p>
+            <a:pPr lvl="0" marL="457200" indent="-228600">
+              <a:buFont typeface="Calibri"/>
               <a:spcAft>
-                <a:spcPts val="400"/>
+                <a:spcPts val="1000"/>
               </a:spcAft>
+              <a:buSzPct val="100000"/>
+              <a:buChar char="•"/>
+              <a:lnSpc>
+                <a:spcPts val="2200"/>
+              </a:lnSpc>
             </a:pPr>
             <a:r>
               <a:rPr sz="2000" b="0">
                 <a:solidFill>
                   <a:srgbClr val="333333"/>
                 </a:solidFill>
-                <a:latin typeface="Consolas"/>
-              </a:rPr>
-              <a:t/>
-            </a:r>
-          </a:p>
-          <a:p>
-            <a:pPr>
-              <a:lnSpc>
-                <a:spcPts val="2200"/>
-              </a:lnSpc>
+                <a:latin typeface="Calibri"/>
+              </a:rPr>
+              <a:t>Think of a group chat with fifty people: it says little about who is friends</a:t>
+            </a:r>
+          </a:p>
+          <a:p>
+            <a:pPr lvl="0" marL="457200" indent="-228600">
+              <a:buFont typeface="Calibri"/>
               <a:spcAft>
-                <a:spcPts val="400"/>
+                <a:spcPts val="1000"/>
               </a:spcAft>
+              <a:buSzPct val="100000"/>
+              <a:buChar char="•"/>
+              <a:lnSpc>
+                <a:spcPts val="2200"/>
+              </a:lnSpc>
             </a:pPr>
             <a:r>
               <a:rPr sz="2000" b="0">
                 <a:solidFill>
                   <a:srgbClr val="333333"/>
                 </a:solidFill>
-                <a:latin typeface="Consolas"/>
-              </a:rPr>
-              <a:t># both graph rankings, starter graph then priority graph</a:t>
-            </a:r>
-          </a:p>
-          <a:p>
-            <a:pPr>
-              <a:lnSpc>
-                <a:spcPts val="2200"/>
-              </a:lnSpc>
+                <a:latin typeface="Calibri"/>
+              </a:rPr>
+              <a:t>A private message between two people says much more</a:t>
+            </a:r>
+          </a:p>
+          <a:p>
+            <a:pPr lvl="0" marL="457200" indent="-228600">
+              <a:buFont typeface="Calibri"/>
               <a:spcAft>
-                <a:spcPts val="400"/>
+                <a:spcPts val="1000"/>
               </a:spcAft>
+              <a:buSzPct val="100000"/>
+              <a:buChar char="•"/>
+              <a:lnSpc>
+                <a:spcPts val="2200"/>
+              </a:lnSpc>
             </a:pPr>
             <a:r>
               <a:rPr sz="2000" b="0">
                 <a:solidFill>
                   <a:srgbClr val="333333"/>
                 </a:solidFill>
-                <a:latin typeface="Consolas"/>
-              </a:rPr>
-              <a:t>python3 ../common/solvers.py examples/tiny_graph.json --mode</a:t>
-            </a:r>
-          </a:p>
-          <a:p>
-            <a:pPr>
-              <a:lnSpc>
-                <a:spcPts val="2200"/>
-              </a:lnSpc>
+                <a:latin typeface="Calibri"/>
+              </a:rPr>
+              <a:t>Recipe three works the same way: each net shares its weight among its pins</a:t>
+            </a:r>
+          </a:p>
+          <a:p>
+            <a:pPr lvl="0" marL="457200" indent="-228600">
+              <a:buFont typeface="Calibri"/>
               <a:spcAft>
-                <a:spcPts val="400"/>
+                <a:spcPts val="1000"/>
               </a:spcAft>
+              <a:buSzPct val="100000"/>
+              <a:buChar char="•"/>
+              <a:lnSpc>
+                <a:spcPts val="2200"/>
+              </a:lnSpc>
             </a:pPr>
             <a:r>
               <a:rPr sz="2000" b="0">
                 <a:solidFill>
                   <a:srgbClr val="333333"/>
                 </a:solidFill>
-                <a:latin typeface="Consolas"/>
-              </a:rPr>
-              <a:t>affinity</a:t>
-            </a:r>
-          </a:p>
-          <a:p>
-            <a:pPr>
-              <a:lnSpc>
-                <a:spcPts val="2200"/>
-              </a:lnSpc>
-              <a:spcAft>
-                <a:spcPts val="400"/>
-              </a:spcAft>
-            </a:pPr>
-            <a:r>
-              <a:rPr sz="2000" b="0">
-                <a:solidFill>
-                  <a:srgbClr val="333333"/>
-                </a:solidFill>
-                <a:latin typeface="Consolas"/>
-              </a:rPr>
-              <a:t>python3 ../common/solvers.py examples/priority_graph.json --mode</a:t>
-            </a:r>
-          </a:p>
-          <a:p>
-            <a:pPr>
-              <a:lnSpc>
-                <a:spcPts val="2200"/>
-              </a:lnSpc>
-              <a:spcAft>
-                <a:spcPts val="400"/>
-              </a:spcAft>
-            </a:pPr>
-            <a:r>
-              <a:rPr sz="2000" b="0">
-                <a:solidFill>
-                  <a:srgbClr val="333333"/>
-                </a:solidFill>
-                <a:latin typeface="Consolas"/>
-              </a:rPr>
-              <a:t>affinity</a:t>
-            </a:r>
-          </a:p>
-          <a:p>
-            <a:pPr>
-              <a:lnSpc>
-                <a:spcPts val="2200"/>
-              </a:lnSpc>
-              <a:spcAft>
-                <a:spcPts val="400"/>
-              </a:spcAft>
-            </a:pPr>
-            <a:r>
-              <a:rPr sz="2000" b="0">
-                <a:solidFill>
-                  <a:srgbClr val="333333"/>
-                </a:solidFill>
-                <a:latin typeface="Consolas"/>
-              </a:rPr>
-              <a:t/>
-            </a:r>
-          </a:p>
-          <a:p>
-            <a:pPr>
-              <a:lnSpc>
-                <a:spcPts val="2200"/>
-              </a:lnSpc>
-              <a:spcAft>
-                <a:spcPts val="400"/>
-              </a:spcAft>
-            </a:pPr>
-            <a:r>
-              <a:rPr sz="2000" b="0">
-                <a:solidFill>
-                  <a:srgbClr val="333333"/>
-                </a:solidFill>
-                <a:latin typeface="Consolas"/>
-              </a:rPr>
-              <a:t># check every golden against your own functions</a:t>
-            </a:r>
-          </a:p>
-          <a:p>
-            <a:pPr>
-              <a:lnSpc>
-                <a:spcPts val="2200"/>
-              </a:lnSpc>
-              <a:spcAft>
-                <a:spcPts val="400"/>
-              </a:spcAft>
-            </a:pPr>
-            <a:r>
-              <a:rPr sz="2000" b="0">
-                <a:solidFill>
-                  <a:srgbClr val="333333"/>
-                </a:solidFill>
-                <a:latin typeface="Consolas"/>
-              </a:rPr>
-              <a:t>python3 examples/affinity_check.py --impl my_affinity.py</a:t>
-            </a:r>
-          </a:p>
-        </p:txBody>
-      </p:sp>
-      <p:sp>
-        <p:nvSpPr>
-          <p:cNvPr id="4" name="TextBox 3"/>
+                <a:latin typeface="Calibri"/>
+              </a:rPr>
+              <a:t>The rule is the weight divided by the number of pins, minus one</a:t>
+            </a:r>
+          </a:p>
+        </p:txBody>
+      </p:sp>
+      <p:pic>
+        <p:nvPicPr>
+          <p:cNvPr id="4" name="Picture 3" descr="wide-nets.png"/>
+          <p:cNvPicPr>
+            <a:picLocks noChangeAspect="1"/>
+          </p:cNvPicPr>
+          <p:nvPr/>
+        </p:nvPicPr>
+        <p:blipFill>
+          <a:blip r:embed="rId2"/>
+          <a:stretch>
+            <a:fillRect/>
+          </a:stretch>
+        </p:blipFill>
+        <p:spPr>
+          <a:xfrm>
+            <a:off x="6172200" y="1234440"/>
+            <a:ext cx="4256116" cy="4754880"/>
+          </a:xfrm>
+          <a:prstGeom prst="rect">
+            <a:avLst/>
+          </a:prstGeom>
+        </p:spPr>
+      </p:pic>
+      <p:sp>
+        <p:nvSpPr>
+          <p:cNvPr id="5" name="TextBox 4"/>
           <p:cNvSpPr txBox="1"/>
           <p:nvPr/>
         </p:nvSpPr>
@@ -5995,7 +6579,7 @@
                 </a:solidFill>
                 <a:latin typeface="Calibri"/>
               </a:rPr>
-              <a:t>Pitfalls to watch</a:t>
+              <a:t>Nets with many pins — try these</a:t>
             </a:r>
           </a:p>
         </p:txBody>
@@ -6008,13 +6592,15 @@
         </p:nvSpPr>
         <p:spPr>
           <a:xfrm>
-            <a:off x="548640" y="1234440"/>
-            <a:ext cx="11064240" cy="4937760"/>
+            <a:off x="548640" y="1143000"/>
+            <a:ext cx="11064240" cy="5029200"/>
           </a:xfrm>
           <a:prstGeom prst="rect">
             <a:avLst/>
           </a:prstGeom>
-          <a:noFill/>
+          <a:solidFill>
+            <a:srgbClr val="F4F4F4"/>
+          </a:solidFill>
         </p:spPr>
         <p:txBody>
           <a:bodyPr wrap="square">
@@ -6022,113 +6608,117 @@
           </a:bodyPr>
           <a:lstStyle/>
           <a:p>
-            <a:pPr lvl="0" marL="457200" indent="-228600">
-              <a:buFont typeface="Calibri"/>
+            <a:pPr>
+              <a:lnSpc>
+                <a:spcPts val="2200"/>
+              </a:lnSpc>
               <a:spcAft>
-                <a:spcPts val="1000"/>
+                <a:spcPts val="400"/>
               </a:spcAft>
-              <a:buSzPct val="100000"/>
-              <a:buChar char="•"/>
-              <a:lnSpc>
-                <a:spcPts val="2200"/>
-              </a:lnSpc>
             </a:pPr>
             <a:r>
               <a:rPr sz="2000" b="0">
                 <a:solidFill>
                   <a:srgbClr val="333333"/>
                 </a:solidFill>
-                <a:latin typeface="Calibri"/>
-              </a:rPr>
-              <a:t>Watch for four things</a:t>
-            </a:r>
-          </a:p>
-          <a:p>
-            <a:pPr lvl="0" marL="457200" indent="-228600">
-              <a:buFont typeface="Calibri"/>
+                <a:latin typeface="Consolas"/>
+              </a:rPr>
+              <a:t>tiny netlist: en {A,B,C,D,E}, rst {A,B,C,D,E}, n1 {E,F}</a:t>
+            </a:r>
+          </a:p>
+          <a:p>
+            <a:pPr>
+              <a:lnSpc>
+                <a:spcPts val="2200"/>
+              </a:lnSpc>
               <a:spcAft>
-                <a:spcPts val="1000"/>
+                <a:spcPts val="400"/>
               </a:spcAft>
-              <a:buSzPct val="100000"/>
-              <a:buChar char="•"/>
-              <a:lnSpc>
-                <a:spcPts val="2200"/>
-              </a:lnSpc>
             </a:pPr>
             <a:r>
               <a:rPr sz="2000" b="0">
                 <a:solidFill>
                   <a:srgbClr val="333333"/>
                 </a:solidFill>
-                <a:latin typeface="Calibri"/>
-              </a:rPr>
-              <a:t>Counting an undirected edge twice, once from each end</a:t>
-            </a:r>
-          </a:p>
-          <a:p>
-            <a:pPr lvl="0" marL="457200" indent="-228600">
-              <a:buFont typeface="Calibri"/>
+                <a:latin typeface="Consolas"/>
+              </a:rPr>
+              <a:t/>
+            </a:r>
+          </a:p>
+          <a:p>
+            <a:pPr>
+              <a:lnSpc>
+                <a:spcPts val="2200"/>
+              </a:lnSpc>
               <a:spcAft>
-                <a:spcPts val="1000"/>
+                <a:spcPts val="400"/>
               </a:spcAft>
-              <a:buSzPct val="100000"/>
-              <a:buChar char="•"/>
-              <a:lnSpc>
-                <a:spcPts val="2200"/>
-              </a:lnSpc>
             </a:pPr>
             <a:r>
               <a:rPr sz="2000" b="0">
                 <a:solidFill>
                   <a:srgbClr val="333333"/>
                 </a:solidFill>
-                <a:latin typeface="Calibri"/>
-              </a:rPr>
-              <a:t>Adding the larger spoke instead of the smaller one, which makes everything look close</a:t>
-            </a:r>
-          </a:p>
-          <a:p>
-            <a:pPr lvl="0" marL="457200" indent="-228600">
-              <a:buFont typeface="Calibri"/>
+                <a:latin typeface="Consolas"/>
+              </a:rPr>
+              <a:t>           raw net count     pin-count w/(|e|-1)</a:t>
+            </a:r>
+          </a:p>
+          <a:p>
+            <a:pPr>
+              <a:lnSpc>
+                <a:spcPts val="2200"/>
+              </a:lnSpc>
               <a:spcAft>
-                <a:spcPts val="1000"/>
+                <a:spcPts val="400"/>
               </a:spcAft>
-              <a:buSzPct val="100000"/>
-              <a:buChar char="•"/>
-              <a:lnSpc>
-                <a:spcPts val="2200"/>
-              </a:lnSpc>
             </a:pPr>
             <a:r>
               <a:rPr sz="2000" b="0">
                 <a:solidFill>
                   <a:srgbClr val="333333"/>
                 </a:solidFill>
-                <a:latin typeface="Calibri"/>
-              </a:rPr>
-              <a:t>Forgetting the tie-break, so A–B and D–E swap places from run to run</a:t>
-            </a:r>
-          </a:p>
-          <a:p>
-            <a:pPr lvl="0" marL="457200" indent="-228600">
-              <a:buFont typeface="Calibri"/>
+                <a:latin typeface="Consolas"/>
+              </a:rPr>
+              <a:t>A-B        1 + 1 = 2         1/4 + 1/4 = 0.5</a:t>
+            </a:r>
+          </a:p>
+          <a:p>
+            <a:pPr>
+              <a:lnSpc>
+                <a:spcPts val="2200"/>
+              </a:lnSpc>
               <a:spcAft>
-                <a:spcPts val="1000"/>
+                <a:spcPts val="400"/>
               </a:spcAft>
-              <a:buSzPct val="100000"/>
-              <a:buChar char="•"/>
-              <a:lnSpc>
-                <a:spcPts val="2200"/>
-              </a:lnSpc>
             </a:pPr>
             <a:r>
               <a:rPr sz="2000" b="0">
                 <a:solidFill>
                   <a:srgbClr val="333333"/>
                 </a:solidFill>
-                <a:latin typeface="Calibri"/>
-              </a:rPr>
-              <a:t>And using raw net counts on a netlist</a:t>
+                <a:latin typeface="Consolas"/>
+              </a:rPr>
+              <a:t>E-F        1                 1/1 = 1.0</a:t>
+            </a:r>
+          </a:p>
+          <a:p>
+            <a:pPr>
+              <a:lnSpc>
+                <a:spcPts val="2200"/>
+              </a:lnSpc>
+              <a:spcAft>
+                <a:spcPts val="400"/>
+              </a:spcAft>
+            </a:pPr>
+            <a:r>
+              <a:rPr sz="2000" b="0">
+                <a:solidFill>
+                  <a:srgbClr val="333333"/>
+                </a:solidFill>
+                <a:latin typeface="Consolas"/>
+              </a:rPr>
+              <a:t>first      A-B               E-F</a:t>
             </a:r>
           </a:p>
         </p:txBody>
@@ -6224,21 +6814,45 @@
                 </a:solidFill>
                 <a:latin typeface="Calibri"/>
               </a:rPr>
-              <a:t>Your turn</a:t>
-            </a:r>
-          </a:p>
-        </p:txBody>
-      </p:sp>
-      <p:sp>
-        <p:nvSpPr>
-          <p:cNvPr id="3" name="TextBox 2"/>
+              <a:t>Browser lab track</a:t>
+            </a:r>
+          </a:p>
+        </p:txBody>
+      </p:sp>
+      <p:pic>
+        <p:nvPicPr>
+          <p:cNvPr id="3" name="Picture 2" descr="lab-starter.png"/>
+          <p:cNvPicPr>
+            <a:picLocks noChangeAspect="1"/>
+          </p:cNvPicPr>
+          <p:nvPr/>
+        </p:nvPicPr>
+        <p:blipFill>
+          <a:blip r:embed="rId2"/>
+          <a:stretch>
+            <a:fillRect/>
+          </a:stretch>
+        </p:blipFill>
+        <p:spPr>
+          <a:xfrm>
+            <a:off x="548640" y="1143000"/>
+            <a:ext cx="6854354" cy="4572000"/>
+          </a:xfrm>
+          <a:prstGeom prst="rect">
+            <a:avLst/>
+          </a:prstGeom>
+        </p:spPr>
+      </p:pic>
+      <p:sp>
+        <p:nvSpPr>
+          <p:cNvPr id="4" name="TextBox 3"/>
           <p:cNvSpPr txBox="1"/>
           <p:nvPr/>
         </p:nvSpPr>
         <p:spPr>
           <a:xfrm>
-            <a:off x="548640" y="1234440"/>
-            <a:ext cx="11064240" cy="4937760"/>
+            <a:off x="548640" y="5897880"/>
+            <a:ext cx="11064240" cy="411480"/>
           </a:xfrm>
           <a:prstGeom prst="rect">
             <a:avLst/>
@@ -6251,47 +6865,508 @@
           </a:bodyPr>
           <a:lstStyle/>
           <a:p>
-            <a:pPr lvl="0" marL="457200" indent="-228600">
-              <a:buFont typeface="Calibri"/>
+            <a:pPr>
+              <a:lnSpc>
+                <a:spcPts val="2200"/>
+              </a:lnSpc>
+            </a:pPr>
+            <a:r>
+              <a:rPr sz="1200" b="0">
+                <a:solidFill>
+                  <a:srgbClr val="333333"/>
+                </a:solidFill>
+                <a:latin typeface="Calibri"/>
+              </a:rPr>
+              <a:t>Browser lab starter</a:t>
+            </a:r>
+          </a:p>
+        </p:txBody>
+      </p:sp>
+      <p:sp>
+        <p:nvSpPr>
+          <p:cNvPr id="5" name="TextBox 4"/>
+          <p:cNvSpPr txBox="1"/>
+          <p:nvPr/>
+        </p:nvSpPr>
+        <p:spPr>
+          <a:xfrm>
+            <a:off x="548640" y="6355080"/>
+            <a:ext cx="11064240" cy="320040"/>
+          </a:xfrm>
+          <a:prstGeom prst="rect">
+            <a:avLst/>
+          </a:prstGeom>
+          <a:noFill/>
+        </p:spPr>
+        <p:txBody>
+          <a:bodyPr wrap="square">
+            <a:noAutofit/>
+          </a:bodyPr>
+          <a:lstStyle/>
+          <a:p>
+            <a:pPr algn="r">
+              <a:lnSpc>
+                <a:spcPts val="2200"/>
+              </a:lnSpc>
+              <a:defRPr sz="1000" b="0">
+                <a:solidFill>
+                  <a:srgbClr val="666666"/>
+                </a:solidFill>
+                <a:latin typeface="Calibri"/>
+              </a:defRPr>
+            </a:pPr>
+            <a:r>
+              <a:t>learn_clustering — 01 affinity metrics</a:t>
+            </a:r>
+          </a:p>
+        </p:txBody>
+      </p:sp>
+    </p:spTree>
+  </p:cSld>
+  <p:clrMapOvr>
+    <a:masterClrMapping/>
+  </p:clrMapOvr>
+</p:sld>
+</file>
+
+<file path=ppt/slides/slide18.xml><?xml version="1.0" encoding="utf-8"?>
+<p:sld xmlns:a="http://schemas.openxmlformats.org/drawingml/2006/main" xmlns:p="http://schemas.openxmlformats.org/presentationml/2006/main" xmlns:r="http://schemas.openxmlformats.org/officeDocument/2006/relationships">
+  <p:cSld>
+    <p:spTree>
+      <p:nvGrpSpPr>
+        <p:cNvPr id="1" name=""/>
+        <p:cNvGrpSpPr/>
+        <p:nvPr/>
+      </p:nvGrpSpPr>
+      <p:grpSpPr/>
+      <p:sp>
+        <p:nvSpPr>
+          <p:cNvPr id="2" name="TextBox 1"/>
+          <p:cNvSpPr txBox="1"/>
+          <p:nvPr/>
+        </p:nvSpPr>
+        <p:spPr>
+          <a:xfrm>
+            <a:off x="548640" y="411480"/>
+            <a:ext cx="11064240" cy="777240"/>
+          </a:xfrm>
+          <a:prstGeom prst="rect">
+            <a:avLst/>
+          </a:prstGeom>
+          <a:noFill/>
+        </p:spPr>
+        <p:txBody>
+          <a:bodyPr wrap="square">
+            <a:noAutofit/>
+          </a:bodyPr>
+          <a:lstStyle/>
+          <a:p>
+            <a:pPr>
+              <a:lnSpc>
+                <a:spcPts val="2200"/>
+              </a:lnSpc>
+            </a:pPr>
+            <a:r>
+              <a:rPr sz="2800" b="1">
+                <a:solidFill>
+                  <a:srgbClr val="1A1A2E"/>
+                </a:solidFill>
+                <a:latin typeface="Calibri"/>
+              </a:rPr>
+              <a:t>Implement track</a:t>
+            </a:r>
+          </a:p>
+        </p:txBody>
+      </p:sp>
+      <p:pic>
+        <p:nvPicPr>
+          <p:cNvPr id="3" name="Picture 2" descr="real-shell.png"/>
+          <p:cNvPicPr>
+            <a:picLocks noChangeAspect="1"/>
+          </p:cNvPicPr>
+          <p:nvPr/>
+        </p:nvPicPr>
+        <p:blipFill>
+          <a:blip r:embed="rId2"/>
+          <a:stretch>
+            <a:fillRect/>
+          </a:stretch>
+        </p:blipFill>
+        <p:spPr>
+          <a:xfrm>
+            <a:off x="548640" y="1143000"/>
+            <a:ext cx="9160625" cy="4572000"/>
+          </a:xfrm>
+          <a:prstGeom prst="rect">
+            <a:avLst/>
+          </a:prstGeom>
+        </p:spPr>
+      </p:pic>
+      <p:sp>
+        <p:nvSpPr>
+          <p:cNvPr id="4" name="TextBox 3"/>
+          <p:cNvSpPr txBox="1"/>
+          <p:nvPr/>
+        </p:nvSpPr>
+        <p:spPr>
+          <a:xfrm>
+            <a:off x="548640" y="5897880"/>
+            <a:ext cx="11064240" cy="411480"/>
+          </a:xfrm>
+          <a:prstGeom prst="rect">
+            <a:avLst/>
+          </a:prstGeom>
+          <a:noFill/>
+        </p:spPr>
+        <p:txBody>
+          <a:bodyPr wrap="square">
+            <a:noAutofit/>
+          </a:bodyPr>
+          <a:lstStyle/>
+          <a:p>
+            <a:pPr>
+              <a:lnSpc>
+                <a:spcPts val="2200"/>
+              </a:lnSpc>
+            </a:pPr>
+            <a:r>
+              <a:rPr sz="1200" b="0">
+                <a:solidFill>
+                  <a:srgbClr val="333333"/>
+                </a:solidFill>
+                <a:latin typeface="Calibri"/>
+              </a:rPr>
+              <a:t>Real shell session</a:t>
+            </a:r>
+          </a:p>
+        </p:txBody>
+      </p:sp>
+      <p:sp>
+        <p:nvSpPr>
+          <p:cNvPr id="5" name="TextBox 4"/>
+          <p:cNvSpPr txBox="1"/>
+          <p:nvPr/>
+        </p:nvSpPr>
+        <p:spPr>
+          <a:xfrm>
+            <a:off x="548640" y="6355080"/>
+            <a:ext cx="11064240" cy="320040"/>
+          </a:xfrm>
+          <a:prstGeom prst="rect">
+            <a:avLst/>
+          </a:prstGeom>
+          <a:noFill/>
+        </p:spPr>
+        <p:txBody>
+          <a:bodyPr wrap="square">
+            <a:noAutofit/>
+          </a:bodyPr>
+          <a:lstStyle/>
+          <a:p>
+            <a:pPr algn="r">
+              <a:lnSpc>
+                <a:spcPts val="2200"/>
+              </a:lnSpc>
+              <a:defRPr sz="1000" b="0">
+                <a:solidFill>
+                  <a:srgbClr val="666666"/>
+                </a:solidFill>
+                <a:latin typeface="Calibri"/>
+              </a:defRPr>
+            </a:pPr>
+            <a:r>
+              <a:t>learn_clustering — 01 affinity metrics</a:t>
+            </a:r>
+          </a:p>
+        </p:txBody>
+      </p:sp>
+    </p:spTree>
+  </p:cSld>
+  <p:clrMapOvr>
+    <a:masterClrMapping/>
+  </p:clrMapOvr>
+</p:sld>
+</file>
+
+<file path=ppt/slides/slide19.xml><?xml version="1.0" encoding="utf-8"?>
+<p:sld xmlns:a="http://schemas.openxmlformats.org/drawingml/2006/main" xmlns:p="http://schemas.openxmlformats.org/presentationml/2006/main" xmlns:r="http://schemas.openxmlformats.org/officeDocument/2006/relationships">
+  <p:cSld>
+    <p:spTree>
+      <p:nvGrpSpPr>
+        <p:cNvPr id="1" name=""/>
+        <p:cNvGrpSpPr/>
+        <p:nvPr/>
+      </p:nvGrpSpPr>
+      <p:grpSpPr/>
+      <p:sp>
+        <p:nvSpPr>
+          <p:cNvPr id="2" name="TextBox 1"/>
+          <p:cNvSpPr txBox="1"/>
+          <p:nvPr/>
+        </p:nvSpPr>
+        <p:spPr>
+          <a:xfrm>
+            <a:off x="548640" y="411480"/>
+            <a:ext cx="11064240" cy="777240"/>
+          </a:xfrm>
+          <a:prstGeom prst="rect">
+            <a:avLst/>
+          </a:prstGeom>
+          <a:noFill/>
+        </p:spPr>
+        <p:txBody>
+          <a:bodyPr wrap="square">
+            <a:noAutofit/>
+          </a:bodyPr>
+          <a:lstStyle/>
+          <a:p>
+            <a:pPr>
+              <a:lnSpc>
+                <a:spcPts val="2200"/>
+              </a:lnSpc>
+            </a:pPr>
+            <a:r>
+              <a:rPr sz="2800" b="1">
+                <a:solidFill>
+                  <a:srgbClr val="1A1A2E"/>
+                </a:solidFill>
+                <a:latin typeface="Calibri"/>
+              </a:rPr>
+              <a:t>Implement track — try these</a:t>
+            </a:r>
+          </a:p>
+        </p:txBody>
+      </p:sp>
+      <p:sp>
+        <p:nvSpPr>
+          <p:cNvPr id="3" name="TextBox 2"/>
+          <p:cNvSpPr txBox="1"/>
+          <p:nvPr/>
+        </p:nvSpPr>
+        <p:spPr>
+          <a:xfrm>
+            <a:off x="548640" y="1143000"/>
+            <a:ext cx="11064240" cy="5029200"/>
+          </a:xfrm>
+          <a:prstGeom prst="rect">
+            <a:avLst/>
+          </a:prstGeom>
+          <a:solidFill>
+            <a:srgbClr val="F4F4F4"/>
+          </a:solidFill>
+        </p:spPr>
+        <p:txBody>
+          <a:bodyPr wrap="square">
+            <a:noAutofit/>
+          </a:bodyPr>
+          <a:lstStyle/>
+          <a:p>
+            <a:pPr>
+              <a:lnSpc>
+                <a:spcPts val="2200"/>
+              </a:lnSpc>
               <a:spcAft>
-                <a:spcPts val="1000"/>
+                <a:spcPts val="400"/>
               </a:spcAft>
-              <a:buSzPct val="100000"/>
-              <a:buChar char="•"/>
-              <a:lnSpc>
-                <a:spcPts val="2200"/>
-              </a:lnSpc>
             </a:pPr>
             <a:r>
               <a:rPr sz="2000" b="0">
                 <a:solidFill>
                   <a:srgbClr val="333333"/>
                 </a:solidFill>
-                <a:latin typeface="Calibri"/>
-              </a:rPr>
-              <a:t>Match all three golden checks, then explain two things in your own words</a:t>
-            </a:r>
-          </a:p>
-          <a:p>
-            <a:pPr lvl="0" marL="457200" indent="-228600">
-              <a:buFont typeface="Calibri"/>
+                <a:latin typeface="Consolas"/>
+              </a:rPr>
+              <a:t># point Python at the shared helpers</a:t>
+            </a:r>
+          </a:p>
+          <a:p>
+            <a:pPr>
+              <a:lnSpc>
+                <a:spcPts val="2200"/>
+              </a:lnSpc>
               <a:spcAft>
-                <a:spcPts val="1000"/>
+                <a:spcPts val="400"/>
               </a:spcAft>
-              <a:buSzPct val="100000"/>
-              <a:buChar char="•"/>
-              <a:lnSpc>
-                <a:spcPts val="2200"/>
-              </a:lnSpc>
             </a:pPr>
             <a:r>
               <a:rPr sz="2000" b="0">
                 <a:solidFill>
                   <a:srgbClr val="333333"/>
                 </a:solidFill>
-                <a:latin typeface="Calibri"/>
-              </a:rPr>
-              <a:t>Take the short quiz</a:t>
+                <a:latin typeface="Consolas"/>
+              </a:rPr>
+              <a:t>export PYTHONPATH=../common</a:t>
+            </a:r>
+          </a:p>
+          <a:p>
+            <a:pPr>
+              <a:lnSpc>
+                <a:spcPts val="2200"/>
+              </a:lnSpc>
+              <a:spcAft>
+                <a:spcPts val="400"/>
+              </a:spcAft>
+            </a:pPr>
+            <a:r>
+              <a:rPr sz="2000" b="0">
+                <a:solidFill>
+                  <a:srgbClr val="333333"/>
+                </a:solidFill>
+                <a:latin typeface="Consolas"/>
+              </a:rPr>
+              <a:t/>
+            </a:r>
+          </a:p>
+          <a:p>
+            <a:pPr>
+              <a:lnSpc>
+                <a:spcPts val="2200"/>
+              </a:lnSpc>
+              <a:spcAft>
+                <a:spcPts val="400"/>
+              </a:spcAft>
+            </a:pPr>
+            <a:r>
+              <a:rPr sz="2000" b="0">
+                <a:solidFill>
+                  <a:srgbClr val="333333"/>
+                </a:solidFill>
+                <a:latin typeface="Consolas"/>
+              </a:rPr>
+              <a:t># both graph rankings, starter graph then priority graph</a:t>
+            </a:r>
+          </a:p>
+          <a:p>
+            <a:pPr>
+              <a:lnSpc>
+                <a:spcPts val="2200"/>
+              </a:lnSpc>
+              <a:spcAft>
+                <a:spcPts val="400"/>
+              </a:spcAft>
+            </a:pPr>
+            <a:r>
+              <a:rPr sz="2000" b="0">
+                <a:solidFill>
+                  <a:srgbClr val="333333"/>
+                </a:solidFill>
+                <a:latin typeface="Consolas"/>
+              </a:rPr>
+              <a:t>python3 ../common/solvers.py examples/tiny_graph.json --mode</a:t>
+            </a:r>
+          </a:p>
+          <a:p>
+            <a:pPr>
+              <a:lnSpc>
+                <a:spcPts val="2200"/>
+              </a:lnSpc>
+              <a:spcAft>
+                <a:spcPts val="400"/>
+              </a:spcAft>
+            </a:pPr>
+            <a:r>
+              <a:rPr sz="2000" b="0">
+                <a:solidFill>
+                  <a:srgbClr val="333333"/>
+                </a:solidFill>
+                <a:latin typeface="Consolas"/>
+              </a:rPr>
+              <a:t>affinity</a:t>
+            </a:r>
+          </a:p>
+          <a:p>
+            <a:pPr>
+              <a:lnSpc>
+                <a:spcPts val="2200"/>
+              </a:lnSpc>
+              <a:spcAft>
+                <a:spcPts val="400"/>
+              </a:spcAft>
+            </a:pPr>
+            <a:r>
+              <a:rPr sz="2000" b="0">
+                <a:solidFill>
+                  <a:srgbClr val="333333"/>
+                </a:solidFill>
+                <a:latin typeface="Consolas"/>
+              </a:rPr>
+              <a:t>python3 ../common/solvers.py examples/priority_graph.json --mode</a:t>
+            </a:r>
+          </a:p>
+          <a:p>
+            <a:pPr>
+              <a:lnSpc>
+                <a:spcPts val="2200"/>
+              </a:lnSpc>
+              <a:spcAft>
+                <a:spcPts val="400"/>
+              </a:spcAft>
+            </a:pPr>
+            <a:r>
+              <a:rPr sz="2000" b="0">
+                <a:solidFill>
+                  <a:srgbClr val="333333"/>
+                </a:solidFill>
+                <a:latin typeface="Consolas"/>
+              </a:rPr>
+              <a:t>affinity</a:t>
+            </a:r>
+          </a:p>
+          <a:p>
+            <a:pPr>
+              <a:lnSpc>
+                <a:spcPts val="2200"/>
+              </a:lnSpc>
+              <a:spcAft>
+                <a:spcPts val="400"/>
+              </a:spcAft>
+            </a:pPr>
+            <a:r>
+              <a:rPr sz="2000" b="0">
+                <a:solidFill>
+                  <a:srgbClr val="333333"/>
+                </a:solidFill>
+                <a:latin typeface="Consolas"/>
+              </a:rPr>
+              <a:t/>
+            </a:r>
+          </a:p>
+          <a:p>
+            <a:pPr>
+              <a:lnSpc>
+                <a:spcPts val="2200"/>
+              </a:lnSpc>
+              <a:spcAft>
+                <a:spcPts val="400"/>
+              </a:spcAft>
+            </a:pPr>
+            <a:r>
+              <a:rPr sz="2000" b="0">
+                <a:solidFill>
+                  <a:srgbClr val="333333"/>
+                </a:solidFill>
+                <a:latin typeface="Consolas"/>
+              </a:rPr>
+              <a:t># check every golden against your own functions</a:t>
+            </a:r>
+          </a:p>
+          <a:p>
+            <a:pPr>
+              <a:lnSpc>
+                <a:spcPts val="2200"/>
+              </a:lnSpc>
+              <a:spcAft>
+                <a:spcPts val="400"/>
+              </a:spcAft>
+            </a:pPr>
+            <a:r>
+              <a:rPr sz="2000" b="0">
+                <a:solidFill>
+                  <a:srgbClr val="333333"/>
+                </a:solidFill>
+                <a:latin typeface="Consolas"/>
+              </a:rPr>
+              <a:t>python3 examples/affinity_check.py --impl my_affinity.py</a:t>
             </a:r>
           </a:p>
         </p:txBody>
@@ -6387,14 +7462,169 @@
                 </a:solidFill>
                 <a:latin typeface="Calibri"/>
               </a:rPr>
-              <a:t>Start with a tiny weighted graph</a:t>
+              <a:t>From a chip to a graph</a:t>
+            </a:r>
+          </a:p>
+        </p:txBody>
+      </p:sp>
+      <p:sp>
+        <p:nvSpPr>
+          <p:cNvPr id="3" name="TextBox 2"/>
+          <p:cNvSpPr txBox="1"/>
+          <p:nvPr/>
+        </p:nvSpPr>
+        <p:spPr>
+          <a:xfrm>
+            <a:off x="548640" y="1234440"/>
+            <a:ext cx="5303520" cy="4754880"/>
+          </a:xfrm>
+          <a:prstGeom prst="rect">
+            <a:avLst/>
+          </a:prstGeom>
+          <a:noFill/>
+        </p:spPr>
+        <p:txBody>
+          <a:bodyPr wrap="square">
+            <a:noAutofit/>
+          </a:bodyPr>
+          <a:lstStyle/>
+          <a:p>
+            <a:pPr lvl="0" marL="457200" indent="-228600">
+              <a:buFont typeface="Calibri"/>
+              <a:spcAft>
+                <a:spcPts val="1000"/>
+              </a:spcAft>
+              <a:buSzPct val="100000"/>
+              <a:buChar char="•"/>
+              <a:lnSpc>
+                <a:spcPts val="2200"/>
+              </a:lnSpc>
+            </a:pPr>
+            <a:r>
+              <a:rPr sz="2000" b="0">
+                <a:solidFill>
+                  <a:srgbClr val="333333"/>
+                </a:solidFill>
+                <a:latin typeface="Calibri"/>
+              </a:rPr>
+              <a:t>A chip contains cells, the small building blocks of the circuit</a:t>
+            </a:r>
+          </a:p>
+          <a:p>
+            <a:pPr lvl="0" marL="457200" indent="-228600">
+              <a:buFont typeface="Calibri"/>
+              <a:spcAft>
+                <a:spcPts val="1000"/>
+              </a:spcAft>
+              <a:buSzPct val="100000"/>
+              <a:buChar char="•"/>
+              <a:lnSpc>
+                <a:spcPts val="2200"/>
+              </a:lnSpc>
+            </a:pPr>
+            <a:r>
+              <a:rPr sz="2000" b="0">
+                <a:solidFill>
+                  <a:srgbClr val="333333"/>
+                </a:solidFill>
+                <a:latin typeface="Calibri"/>
+              </a:rPr>
+              <a:t>Cells talk to each other through wires</a:t>
+            </a:r>
+          </a:p>
+          <a:p>
+            <a:pPr lvl="0" marL="457200" indent="-228600">
+              <a:buFont typeface="Calibri"/>
+              <a:spcAft>
+                <a:spcPts val="1000"/>
+              </a:spcAft>
+              <a:buSzPct val="100000"/>
+              <a:buChar char="•"/>
+              <a:lnSpc>
+                <a:spcPts val="2200"/>
+              </a:lnSpc>
+            </a:pPr>
+            <a:r>
+              <a:rPr sz="2000" b="0">
+                <a:solidFill>
+                  <a:srgbClr val="333333"/>
+                </a:solidFill>
+                <a:latin typeface="Calibri"/>
+              </a:rPr>
+              <a:t>We draw each cell as a dot, called a node</a:t>
+            </a:r>
+          </a:p>
+          <a:p>
+            <a:pPr lvl="0" marL="457200" indent="-228600">
+              <a:buFont typeface="Calibri"/>
+              <a:spcAft>
+                <a:spcPts val="1000"/>
+              </a:spcAft>
+              <a:buSzPct val="100000"/>
+              <a:buChar char="•"/>
+              <a:lnSpc>
+                <a:spcPts val="2200"/>
+              </a:lnSpc>
+            </a:pPr>
+            <a:r>
+              <a:rPr sz="2000" b="0">
+                <a:solidFill>
+                  <a:srgbClr val="333333"/>
+                </a:solidFill>
+                <a:latin typeface="Calibri"/>
+              </a:rPr>
+              <a:t>A line between two dots is an edge: it means the two cells are wired together</a:t>
+            </a:r>
+          </a:p>
+          <a:p>
+            <a:pPr lvl="0" marL="457200" indent="-228600">
+              <a:buFont typeface="Calibri"/>
+              <a:spcAft>
+                <a:spcPts val="1000"/>
+              </a:spcAft>
+              <a:buSzPct val="100000"/>
+              <a:buChar char="•"/>
+              <a:lnSpc>
+                <a:spcPts val="2200"/>
+              </a:lnSpc>
+            </a:pPr>
+            <a:r>
+              <a:rPr sz="2000" b="0">
+                <a:solidFill>
+                  <a:srgbClr val="333333"/>
+                </a:solidFill>
+                <a:latin typeface="Calibri"/>
+              </a:rPr>
+              <a:t>The number on an edge is its weight: how many wires join the pair</a:t>
+            </a:r>
+          </a:p>
+          <a:p>
+            <a:pPr lvl="0" marL="457200" indent="-228600">
+              <a:buFont typeface="Calibri"/>
+              <a:spcAft>
+                <a:spcPts val="1000"/>
+              </a:spcAft>
+              <a:buSzPct val="100000"/>
+              <a:buChar char="•"/>
+              <a:lnSpc>
+                <a:spcPts val="2200"/>
+              </a:lnSpc>
+            </a:pPr>
+            <a:r>
+              <a:rPr sz="2000" b="0">
+                <a:solidFill>
+                  <a:srgbClr val="333333"/>
+                </a:solidFill>
+                <a:latin typeface="Calibri"/>
+              </a:rPr>
+              <a:t>So A–B has weight five: five wires connect A and B</a:t>
             </a:r>
           </a:p>
         </p:txBody>
       </p:sp>
       <p:pic>
         <p:nvPicPr>
-          <p:cNvPr id="3" name="Picture 2" descr="01-raw-graph.png"/>
+          <p:cNvPr id="4" name="Picture 3" descr="chip-to-graph.png"/>
           <p:cNvPicPr>
             <a:picLocks noChangeAspect="1"/>
           </p:cNvPicPr>
@@ -6408,8 +7638,8 @@
         </p:blipFill>
         <p:spPr>
           <a:xfrm>
-            <a:off x="548640" y="1143000"/>
-            <a:ext cx="9404113" cy="4572000"/>
+            <a:off x="6172200" y="1234440"/>
+            <a:ext cx="3823019" cy="4754880"/>
           </a:xfrm>
           <a:prstGeom prst="rect">
             <a:avLst/>
@@ -6418,14 +7648,14 @@
       </p:pic>
       <p:sp>
         <p:nvSpPr>
-          <p:cNvPr id="4" name="TextBox 3"/>
+          <p:cNvPr id="5" name="TextBox 4"/>
           <p:cNvSpPr txBox="1"/>
           <p:nvPr/>
         </p:nvSpPr>
         <p:spPr>
           <a:xfrm>
-            <a:off x="548640" y="5897880"/>
-            <a:ext cx="11064240" cy="411480"/>
+            <a:off x="548640" y="6355080"/>
+            <a:ext cx="11064240" cy="320040"/>
           </a:xfrm>
           <a:prstGeom prst="rect">
             <a:avLst/>
@@ -6438,26 +7668,718 @@
           </a:bodyPr>
           <a:lstStyle/>
           <a:p>
+            <a:pPr algn="r">
+              <a:lnSpc>
+                <a:spcPts val="2200"/>
+              </a:lnSpc>
+              <a:defRPr sz="1000" b="0">
+                <a:solidFill>
+                  <a:srgbClr val="666666"/>
+                </a:solidFill>
+                <a:latin typeface="Calibri"/>
+              </a:defRPr>
+            </a:pPr>
+            <a:r>
+              <a:t>learn_clustering — 01 affinity metrics</a:t>
+            </a:r>
+          </a:p>
+        </p:txBody>
+      </p:sp>
+    </p:spTree>
+  </p:cSld>
+  <p:clrMapOvr>
+    <a:masterClrMapping/>
+  </p:clrMapOvr>
+</p:sld>
+</file>
+
+<file path=ppt/slides/slide20.xml><?xml version="1.0" encoding="utf-8"?>
+<p:sld xmlns:a="http://schemas.openxmlformats.org/drawingml/2006/main" xmlns:p="http://schemas.openxmlformats.org/presentationml/2006/main" xmlns:r="http://schemas.openxmlformats.org/officeDocument/2006/relationships">
+  <p:cSld>
+    <p:spTree>
+      <p:nvGrpSpPr>
+        <p:cNvPr id="1" name=""/>
+        <p:cNvGrpSpPr/>
+        <p:nvPr/>
+      </p:nvGrpSpPr>
+      <p:grpSpPr/>
+      <p:sp>
+        <p:nvSpPr>
+          <p:cNvPr id="2" name="TextBox 1"/>
+          <p:cNvSpPr txBox="1"/>
+          <p:nvPr/>
+        </p:nvSpPr>
+        <p:spPr>
+          <a:xfrm>
+            <a:off x="548640" y="411480"/>
+            <a:ext cx="11064240" cy="777240"/>
+          </a:xfrm>
+          <a:prstGeom prst="rect">
+            <a:avLst/>
+          </a:prstGeom>
+          <a:noFill/>
+        </p:spPr>
+        <p:txBody>
+          <a:bodyPr wrap="square">
+            <a:noAutofit/>
+          </a:bodyPr>
+          <a:lstStyle/>
+          <a:p>
             <a:pPr>
               <a:lnSpc>
                 <a:spcPts val="2200"/>
               </a:lnSpc>
             </a:pPr>
             <a:r>
-              <a:rPr sz="1200" b="0">
+              <a:rPr sz="2800" b="1">
+                <a:solidFill>
+                  <a:srgbClr val="1A1A2E"/>
+                </a:solidFill>
+                <a:latin typeface="Calibri"/>
+              </a:rPr>
+              <a:t>Pitfalls to watch</a:t>
+            </a:r>
+          </a:p>
+        </p:txBody>
+      </p:sp>
+      <p:sp>
+        <p:nvSpPr>
+          <p:cNvPr id="3" name="TextBox 2"/>
+          <p:cNvSpPr txBox="1"/>
+          <p:nvPr/>
+        </p:nvSpPr>
+        <p:spPr>
+          <a:xfrm>
+            <a:off x="548640" y="1234440"/>
+            <a:ext cx="11064240" cy="4937760"/>
+          </a:xfrm>
+          <a:prstGeom prst="rect">
+            <a:avLst/>
+          </a:prstGeom>
+          <a:noFill/>
+        </p:spPr>
+        <p:txBody>
+          <a:bodyPr wrap="square">
+            <a:noAutofit/>
+          </a:bodyPr>
+          <a:lstStyle/>
+          <a:p>
+            <a:pPr lvl="0" marL="457200" indent="-228600">
+              <a:buFont typeface="Calibri"/>
+              <a:spcAft>
+                <a:spcPts val="1000"/>
+              </a:spcAft>
+              <a:buSzPct val="100000"/>
+              <a:buChar char="•"/>
+              <a:lnSpc>
+                <a:spcPts val="2200"/>
+              </a:lnSpc>
+            </a:pPr>
+            <a:r>
+              <a:rPr sz="2000" b="0">
                 <a:solidFill>
                   <a:srgbClr val="333333"/>
                 </a:solidFill>
                 <a:latin typeface="Calibri"/>
               </a:rPr>
-              <a:t>Start with a tiny weighted graph</a:t>
-            </a:r>
-          </a:p>
-        </p:txBody>
-      </p:sp>
-      <p:sp>
-        <p:nvSpPr>
-          <p:cNvPr id="5" name="TextBox 4"/>
+              <a:t>Watch out for four common mistakes</a:t>
+            </a:r>
+          </a:p>
+          <a:p>
+            <a:pPr lvl="0" marL="457200" indent="-228600">
+              <a:buFont typeface="Calibri"/>
+              <a:spcAft>
+                <a:spcPts val="1000"/>
+              </a:spcAft>
+              <a:buSzPct val="100000"/>
+              <a:buChar char="•"/>
+              <a:lnSpc>
+                <a:spcPts val="2200"/>
+              </a:lnSpc>
+            </a:pPr>
+            <a:r>
+              <a:rPr sz="2000" b="0">
+                <a:solidFill>
+                  <a:srgbClr val="333333"/>
+                </a:solidFill>
+                <a:latin typeface="Calibri"/>
+              </a:rPr>
+              <a:t>Counting an edge twice, once from each end</a:t>
+            </a:r>
+          </a:p>
+          <a:p>
+            <a:pPr lvl="0" marL="457200" indent="-228600">
+              <a:buFont typeface="Calibri"/>
+              <a:spcAft>
+                <a:spcPts val="1000"/>
+              </a:spcAft>
+              <a:buSzPct val="100000"/>
+              <a:buChar char="•"/>
+              <a:lnSpc>
+                <a:spcPts val="2200"/>
+              </a:lnSpc>
+            </a:pPr>
+            <a:r>
+              <a:rPr sz="2000" b="0">
+                <a:solidFill>
+                  <a:srgbClr val="333333"/>
+                </a:solidFill>
+                <a:latin typeface="Calibri"/>
+              </a:rPr>
+              <a:t>Adding the stronger link instead of the weaker one, which makes every pair look close</a:t>
+            </a:r>
+          </a:p>
+          <a:p>
+            <a:pPr lvl="0" marL="457200" indent="-228600">
+              <a:buFont typeface="Calibri"/>
+              <a:spcAft>
+                <a:spcPts val="1000"/>
+              </a:spcAft>
+              <a:buSzPct val="100000"/>
+              <a:buChar char="•"/>
+              <a:lnSpc>
+                <a:spcPts val="2200"/>
+              </a:lnSpc>
+            </a:pPr>
+            <a:r>
+              <a:rPr sz="2000" b="0">
+                <a:solidFill>
+                  <a:srgbClr val="333333"/>
+                </a:solidFill>
+                <a:latin typeface="Calibri"/>
+              </a:rPr>
+              <a:t>Forgetting the tie-break, so A–B and D–E swap places from one run to the next</a:t>
+            </a:r>
+          </a:p>
+          <a:p>
+            <a:pPr lvl="0" marL="457200" indent="-228600">
+              <a:buFont typeface="Calibri"/>
+              <a:spcAft>
+                <a:spcPts val="1000"/>
+              </a:spcAft>
+              <a:buSzPct val="100000"/>
+              <a:buChar char="•"/>
+              <a:lnSpc>
+                <a:spcPts val="2200"/>
+              </a:lnSpc>
+            </a:pPr>
+            <a:r>
+              <a:rPr sz="2000" b="0">
+                <a:solidFill>
+                  <a:srgbClr val="333333"/>
+                </a:solidFill>
+                <a:latin typeface="Calibri"/>
+              </a:rPr>
+              <a:t>And counting big shared nets at full weight, which glues unrelated cells together</a:t>
+            </a:r>
+          </a:p>
+        </p:txBody>
+      </p:sp>
+      <p:sp>
+        <p:nvSpPr>
+          <p:cNvPr id="4" name="TextBox 3"/>
+          <p:cNvSpPr txBox="1"/>
+          <p:nvPr/>
+        </p:nvSpPr>
+        <p:spPr>
+          <a:xfrm>
+            <a:off x="548640" y="6355080"/>
+            <a:ext cx="11064240" cy="320040"/>
+          </a:xfrm>
+          <a:prstGeom prst="rect">
+            <a:avLst/>
+          </a:prstGeom>
+          <a:noFill/>
+        </p:spPr>
+        <p:txBody>
+          <a:bodyPr wrap="square">
+            <a:noAutofit/>
+          </a:bodyPr>
+          <a:lstStyle/>
+          <a:p>
+            <a:pPr algn="r">
+              <a:lnSpc>
+                <a:spcPts val="2200"/>
+              </a:lnSpc>
+              <a:defRPr sz="1000" b="0">
+                <a:solidFill>
+                  <a:srgbClr val="666666"/>
+                </a:solidFill>
+                <a:latin typeface="Calibri"/>
+              </a:defRPr>
+            </a:pPr>
+            <a:r>
+              <a:t>learn_clustering — 01 affinity metrics</a:t>
+            </a:r>
+          </a:p>
+        </p:txBody>
+      </p:sp>
+    </p:spTree>
+  </p:cSld>
+  <p:clrMapOvr>
+    <a:masterClrMapping/>
+  </p:clrMapOvr>
+</p:sld>
+</file>
+
+<file path=ppt/slides/slide21.xml><?xml version="1.0" encoding="utf-8"?>
+<p:sld xmlns:a="http://schemas.openxmlformats.org/drawingml/2006/main" xmlns:p="http://schemas.openxmlformats.org/presentationml/2006/main" xmlns:r="http://schemas.openxmlformats.org/officeDocument/2006/relationships">
+  <p:cSld>
+    <p:spTree>
+      <p:nvGrpSpPr>
+        <p:cNvPr id="1" name=""/>
+        <p:cNvGrpSpPr/>
+        <p:nvPr/>
+      </p:nvGrpSpPr>
+      <p:grpSpPr/>
+      <p:sp>
+        <p:nvSpPr>
+          <p:cNvPr id="2" name="TextBox 1"/>
+          <p:cNvSpPr txBox="1"/>
+          <p:nvPr/>
+        </p:nvSpPr>
+        <p:spPr>
+          <a:xfrm>
+            <a:off x="548640" y="411480"/>
+            <a:ext cx="11064240" cy="777240"/>
+          </a:xfrm>
+          <a:prstGeom prst="rect">
+            <a:avLst/>
+          </a:prstGeom>
+          <a:noFill/>
+        </p:spPr>
+        <p:txBody>
+          <a:bodyPr wrap="square">
+            <a:noAutofit/>
+          </a:bodyPr>
+          <a:lstStyle/>
+          <a:p>
+            <a:pPr>
+              <a:lnSpc>
+                <a:spcPts val="2200"/>
+              </a:lnSpc>
+            </a:pPr>
+            <a:r>
+              <a:rPr sz="2800" b="1">
+                <a:solidFill>
+                  <a:srgbClr val="1A1A2E"/>
+                </a:solidFill>
+                <a:latin typeface="Calibri"/>
+              </a:rPr>
+              <a:t>Recap: three recipes</a:t>
+            </a:r>
+          </a:p>
+        </p:txBody>
+      </p:sp>
+      <p:sp>
+        <p:nvSpPr>
+          <p:cNvPr id="3" name="TextBox 2"/>
+          <p:cNvSpPr txBox="1"/>
+          <p:nvPr/>
+        </p:nvSpPr>
+        <p:spPr>
+          <a:xfrm>
+            <a:off x="548640" y="1234440"/>
+            <a:ext cx="11064240" cy="4937760"/>
+          </a:xfrm>
+          <a:prstGeom prst="rect">
+            <a:avLst/>
+          </a:prstGeom>
+          <a:noFill/>
+        </p:spPr>
+        <p:txBody>
+          <a:bodyPr wrap="square">
+            <a:noAutofit/>
+          </a:bodyPr>
+          <a:lstStyle/>
+          <a:p>
+            <a:pPr lvl="0" marL="457200" indent="-228600">
+              <a:buFont typeface="Calibri"/>
+              <a:spcAft>
+                <a:spcPts val="1000"/>
+              </a:spcAft>
+              <a:buSzPct val="100000"/>
+              <a:buChar char="•"/>
+              <a:lnSpc>
+                <a:spcPts val="2200"/>
+              </a:lnSpc>
+            </a:pPr>
+            <a:r>
+              <a:rPr sz="2000" b="0">
+                <a:solidFill>
+                  <a:srgbClr val="333333"/>
+                </a:solidFill>
+                <a:latin typeface="Calibri"/>
+              </a:rPr>
+              <a:t>Recipe one, edge weight: look only at the direct wire</a:t>
+            </a:r>
+          </a:p>
+          <a:p>
+            <a:pPr lvl="0" marL="457200" indent="-228600">
+              <a:buFont typeface="Calibri"/>
+              <a:spcAft>
+                <a:spcPts val="1000"/>
+              </a:spcAft>
+              <a:buSzPct val="100000"/>
+              <a:buChar char="•"/>
+              <a:lnSpc>
+                <a:spcPts val="2200"/>
+              </a:lnSpc>
+            </a:pPr>
+            <a:r>
+              <a:rPr sz="2000" b="0">
+                <a:solidFill>
+                  <a:srgbClr val="333333"/>
+                </a:solidFill>
+                <a:latin typeface="Calibri"/>
+              </a:rPr>
+              <a:t>Recipe two, shared neighbors: add the help of common friends</a:t>
+            </a:r>
+          </a:p>
+          <a:p>
+            <a:pPr lvl="0" marL="457200" indent="-228600">
+              <a:buFont typeface="Calibri"/>
+              <a:spcAft>
+                <a:spcPts val="1000"/>
+              </a:spcAft>
+              <a:buSzPct val="100000"/>
+              <a:buChar char="•"/>
+              <a:lnSpc>
+                <a:spcPts val="2200"/>
+              </a:lnSpc>
+            </a:pPr>
+            <a:r>
+              <a:rPr sz="2000" b="0">
+                <a:solidFill>
+                  <a:srgbClr val="333333"/>
+                </a:solidFill>
+                <a:latin typeface="Calibri"/>
+              </a:rPr>
+              <a:t>Recipe three, pin count: big shared nets count less than private ones</a:t>
+            </a:r>
+          </a:p>
+          <a:p>
+            <a:pPr lvl="0" marL="457200" indent="-228600">
+              <a:buFont typeface="Calibri"/>
+              <a:spcAft>
+                <a:spcPts val="1000"/>
+              </a:spcAft>
+              <a:buSzPct val="100000"/>
+              <a:buChar char="•"/>
+              <a:lnSpc>
+                <a:spcPts val="2200"/>
+              </a:lnSpc>
+            </a:pPr>
+            <a:r>
+              <a:rPr sz="2000" b="0">
+                <a:solidFill>
+                  <a:srgbClr val="333333"/>
+                </a:solidFill>
+                <a:latin typeface="Calibri"/>
+              </a:rPr>
+              <a:t>Ties are broken alphabetically, so results never change between runs</a:t>
+            </a:r>
+          </a:p>
+          <a:p>
+            <a:pPr lvl="0" marL="457200" indent="-228600">
+              <a:buFont typeface="Calibri"/>
+              <a:spcAft>
+                <a:spcPts val="1000"/>
+              </a:spcAft>
+              <a:buSzPct val="100000"/>
+              <a:buChar char="•"/>
+              <a:lnSpc>
+                <a:spcPts val="2200"/>
+              </a:lnSpc>
+            </a:pPr>
+            <a:r>
+              <a:rPr sz="2000" b="0">
+                <a:solidFill>
+                  <a:srgbClr val="333333"/>
+                </a:solidFill>
+                <a:latin typeface="Calibri"/>
+              </a:rPr>
+              <a:t>Different recipes can choose a different first merge</a:t>
+            </a:r>
+          </a:p>
+          <a:p>
+            <a:pPr lvl="0" marL="457200" indent="-228600">
+              <a:buFont typeface="Calibri"/>
+              <a:spcAft>
+                <a:spcPts val="1000"/>
+              </a:spcAft>
+              <a:buSzPct val="100000"/>
+              <a:buChar char="•"/>
+              <a:lnSpc>
+                <a:spcPts val="2200"/>
+              </a:lnSpc>
+            </a:pPr>
+            <a:r>
+              <a:rPr sz="2000" b="0">
+                <a:solidFill>
+                  <a:srgbClr val="333333"/>
+                </a:solidFill>
+                <a:latin typeface="Calibri"/>
+              </a:rPr>
+              <a:t>Choosing the recipe is a design decision, not a detail</a:t>
+            </a:r>
+          </a:p>
+        </p:txBody>
+      </p:sp>
+      <p:sp>
+        <p:nvSpPr>
+          <p:cNvPr id="4" name="TextBox 3"/>
+          <p:cNvSpPr txBox="1"/>
+          <p:nvPr/>
+        </p:nvSpPr>
+        <p:spPr>
+          <a:xfrm>
+            <a:off x="548640" y="6355080"/>
+            <a:ext cx="11064240" cy="320040"/>
+          </a:xfrm>
+          <a:prstGeom prst="rect">
+            <a:avLst/>
+          </a:prstGeom>
+          <a:noFill/>
+        </p:spPr>
+        <p:txBody>
+          <a:bodyPr wrap="square">
+            <a:noAutofit/>
+          </a:bodyPr>
+          <a:lstStyle/>
+          <a:p>
+            <a:pPr algn="r">
+              <a:lnSpc>
+                <a:spcPts val="2200"/>
+              </a:lnSpc>
+              <a:defRPr sz="1000" b="0">
+                <a:solidFill>
+                  <a:srgbClr val="666666"/>
+                </a:solidFill>
+                <a:latin typeface="Calibri"/>
+              </a:defRPr>
+            </a:pPr>
+            <a:r>
+              <a:t>learn_clustering — 01 affinity metrics</a:t>
+            </a:r>
+          </a:p>
+        </p:txBody>
+      </p:sp>
+    </p:spTree>
+  </p:cSld>
+  <p:clrMapOvr>
+    <a:masterClrMapping/>
+  </p:clrMapOvr>
+</p:sld>
+</file>
+
+<file path=ppt/slides/slide22.xml><?xml version="1.0" encoding="utf-8"?>
+<p:sld xmlns:a="http://schemas.openxmlformats.org/drawingml/2006/main" xmlns:p="http://schemas.openxmlformats.org/presentationml/2006/main" xmlns:r="http://schemas.openxmlformats.org/officeDocument/2006/relationships">
+  <p:cSld>
+    <p:spTree>
+      <p:nvGrpSpPr>
+        <p:cNvPr id="1" name=""/>
+        <p:cNvGrpSpPr/>
+        <p:nvPr/>
+      </p:nvGrpSpPr>
+      <p:grpSpPr/>
+      <p:sp>
+        <p:nvSpPr>
+          <p:cNvPr id="2" name="TextBox 1"/>
+          <p:cNvSpPr txBox="1"/>
+          <p:nvPr/>
+        </p:nvSpPr>
+        <p:spPr>
+          <a:xfrm>
+            <a:off x="548640" y="411480"/>
+            <a:ext cx="11064240" cy="777240"/>
+          </a:xfrm>
+          <a:prstGeom prst="rect">
+            <a:avLst/>
+          </a:prstGeom>
+          <a:noFill/>
+        </p:spPr>
+        <p:txBody>
+          <a:bodyPr wrap="square">
+            <a:noAutofit/>
+          </a:bodyPr>
+          <a:lstStyle/>
+          <a:p>
+            <a:pPr>
+              <a:lnSpc>
+                <a:spcPts val="2200"/>
+              </a:lnSpc>
+            </a:pPr>
+            <a:r>
+              <a:rPr sz="2800" b="1">
+                <a:solidFill>
+                  <a:srgbClr val="1A1A2E"/>
+                </a:solidFill>
+                <a:latin typeface="Calibri"/>
+              </a:rPr>
+              <a:t>Your turn</a:t>
+            </a:r>
+          </a:p>
+        </p:txBody>
+      </p:sp>
+      <p:sp>
+        <p:nvSpPr>
+          <p:cNvPr id="3" name="TextBox 2"/>
+          <p:cNvSpPr txBox="1"/>
+          <p:nvPr/>
+        </p:nvSpPr>
+        <p:spPr>
+          <a:xfrm>
+            <a:off x="548640" y="1234440"/>
+            <a:ext cx="11064240" cy="4937760"/>
+          </a:xfrm>
+          <a:prstGeom prst="rect">
+            <a:avLst/>
+          </a:prstGeom>
+          <a:noFill/>
+        </p:spPr>
+        <p:txBody>
+          <a:bodyPr wrap="square">
+            <a:noAutofit/>
+          </a:bodyPr>
+          <a:lstStyle/>
+          <a:p>
+            <a:pPr lvl="0" marL="457200" indent="-228600">
+              <a:buFont typeface="Calibri"/>
+              <a:spcAft>
+                <a:spcPts val="1000"/>
+              </a:spcAft>
+              <a:buSzPct val="100000"/>
+              <a:buChar char="•"/>
+              <a:lnSpc>
+                <a:spcPts val="2200"/>
+              </a:lnSpc>
+            </a:pPr>
+            <a:r>
+              <a:rPr sz="2000" b="0">
+                <a:solidFill>
+                  <a:srgbClr val="333333"/>
+                </a:solidFill>
+                <a:latin typeface="Calibri"/>
+              </a:rPr>
+              <a:t>Try the browser lab challenges, or write the three recipes yourself and pass the checker</a:t>
+            </a:r>
+          </a:p>
+          <a:p>
+            <a:pPr lvl="0" marL="457200" indent="-228600">
+              <a:buFont typeface="Calibri"/>
+              <a:spcAft>
+                <a:spcPts val="1000"/>
+              </a:spcAft>
+              <a:buSzPct val="100000"/>
+              <a:buChar char="•"/>
+              <a:lnSpc>
+                <a:spcPts val="2200"/>
+              </a:lnSpc>
+            </a:pPr>
+            <a:r>
+              <a:rPr sz="2000" b="0">
+                <a:solidFill>
+                  <a:srgbClr val="333333"/>
+                </a:solidFill>
+                <a:latin typeface="Calibri"/>
+              </a:rPr>
+              <a:t>Then explain two things in your own words</a:t>
+            </a:r>
+          </a:p>
+          <a:p>
+            <a:pPr lvl="0" marL="457200" indent="-228600">
+              <a:buFont typeface="Calibri"/>
+              <a:spcAft>
+                <a:spcPts val="1000"/>
+              </a:spcAft>
+              <a:buSzPct val="100000"/>
+              <a:buChar char="•"/>
+              <a:lnSpc>
+                <a:spcPts val="2200"/>
+              </a:lnSpc>
+            </a:pPr>
+            <a:r>
+              <a:rPr sz="2000" b="0">
+                <a:solidFill>
+                  <a:srgbClr val="333333"/>
+                </a:solidFill>
+                <a:latin typeface="Calibri"/>
+              </a:rPr>
+              <a:t>First, why does A–C climb with recipe two?</a:t>
+            </a:r>
+          </a:p>
+          <a:p>
+            <a:pPr lvl="0" marL="457200" indent="-228600">
+              <a:buFont typeface="Calibri"/>
+              <a:spcAft>
+                <a:spcPts val="1000"/>
+              </a:spcAft>
+              <a:buSzPct val="100000"/>
+              <a:buChar char="•"/>
+              <a:lnSpc>
+                <a:spcPts val="2200"/>
+              </a:lnSpc>
+            </a:pPr>
+            <a:r>
+              <a:rPr sz="2000" b="0">
+                <a:solidFill>
+                  <a:srgbClr val="333333"/>
+                </a:solidFill>
+                <a:latin typeface="Calibri"/>
+              </a:rPr>
+              <a:t>Second, why does the priority graph change its first merge?</a:t>
+            </a:r>
+          </a:p>
+          <a:p>
+            <a:pPr lvl="0" marL="457200" indent="-228600">
+              <a:buFont typeface="Calibri"/>
+              <a:spcAft>
+                <a:spcPts val="1000"/>
+              </a:spcAft>
+              <a:buSzPct val="100000"/>
+              <a:buChar char="•"/>
+              <a:lnSpc>
+                <a:spcPts val="2200"/>
+              </a:lnSpc>
+            </a:pPr>
+            <a:r>
+              <a:rPr sz="2000" b="0">
+                <a:solidFill>
+                  <a:srgbClr val="333333"/>
+                </a:solidFill>
+                <a:latin typeface="Calibri"/>
+              </a:rPr>
+              <a:t>Take the short quiz, then move on to greedy pair merge</a:t>
+            </a:r>
+          </a:p>
+          <a:p>
+            <a:pPr lvl="0" marL="457200" indent="-228600">
+              <a:buFont typeface="Calibri"/>
+              <a:spcAft>
+                <a:spcPts val="1000"/>
+              </a:spcAft>
+              <a:buSzPct val="100000"/>
+              <a:buChar char="•"/>
+              <a:lnSpc>
+                <a:spcPts val="2200"/>
+              </a:lnSpc>
+            </a:pPr>
+            <a:r>
+              <a:rPr sz="2000" b="0">
+                <a:solidFill>
+                  <a:srgbClr val="333333"/>
+                </a:solidFill>
+                <a:latin typeface="Calibri"/>
+              </a:rPr>
+              <a:t>There, these scores become the rule for merging</a:t>
+            </a:r>
+          </a:p>
+        </p:txBody>
+      </p:sp>
+      <p:sp>
+        <p:nvSpPr>
+          <p:cNvPr id="4" name="TextBox 3"/>
           <p:cNvSpPr txBox="1"/>
           <p:nvPr/>
         </p:nvSpPr>
@@ -6546,14 +8468,169 @@
                 </a:solidFill>
                 <a:latin typeface="Calibri"/>
               </a:rPr>
-              <a:t>Edge-weight affinity ranks pairs</a:t>
+              <a:t>Why group cells?</a:t>
+            </a:r>
+          </a:p>
+        </p:txBody>
+      </p:sp>
+      <p:sp>
+        <p:nvSpPr>
+          <p:cNvPr id="3" name="TextBox 2"/>
+          <p:cNvSpPr txBox="1"/>
+          <p:nvPr/>
+        </p:nvSpPr>
+        <p:spPr>
+          <a:xfrm>
+            <a:off x="548640" y="1234440"/>
+            <a:ext cx="5303520" cy="4754880"/>
+          </a:xfrm>
+          <a:prstGeom prst="rect">
+            <a:avLst/>
+          </a:prstGeom>
+          <a:noFill/>
+        </p:spPr>
+        <p:txBody>
+          <a:bodyPr wrap="square">
+            <a:noAutofit/>
+          </a:bodyPr>
+          <a:lstStyle/>
+          <a:p>
+            <a:pPr lvl="0" marL="457200" indent="-228600">
+              <a:buFont typeface="Calibri"/>
+              <a:spcAft>
+                <a:spcPts val="1000"/>
+              </a:spcAft>
+              <a:buSzPct val="100000"/>
+              <a:buChar char="•"/>
+              <a:lnSpc>
+                <a:spcPts val="2200"/>
+              </a:lnSpc>
+            </a:pPr>
+            <a:r>
+              <a:rPr sz="2000" b="0">
+                <a:solidFill>
+                  <a:srgbClr val="333333"/>
+                </a:solidFill>
+                <a:latin typeface="Calibri"/>
+              </a:rPr>
+              <a:t>Cells that exchange many signals should sit close together</a:t>
+            </a:r>
+          </a:p>
+          <a:p>
+            <a:pPr lvl="0" marL="457200" indent="-228600">
+              <a:buFont typeface="Calibri"/>
+              <a:spcAft>
+                <a:spcPts val="1000"/>
+              </a:spcAft>
+              <a:buSzPct val="100000"/>
+              <a:buChar char="•"/>
+              <a:lnSpc>
+                <a:spcPts val="2200"/>
+              </a:lnSpc>
+            </a:pPr>
+            <a:r>
+              <a:rPr sz="2000" b="0">
+                <a:solidFill>
+                  <a:srgbClr val="333333"/>
+                </a:solidFill>
+                <a:latin typeface="Calibri"/>
+              </a:rPr>
+              <a:t>Short wires make the chip faster and save energy</a:t>
+            </a:r>
+          </a:p>
+          <a:p>
+            <a:pPr lvl="0" marL="457200" indent="-228600">
+              <a:buFont typeface="Calibri"/>
+              <a:spcAft>
+                <a:spcPts val="1000"/>
+              </a:spcAft>
+              <a:buSzPct val="100000"/>
+              <a:buChar char="•"/>
+              <a:lnSpc>
+                <a:spcPts val="2200"/>
+              </a:lnSpc>
+            </a:pPr>
+            <a:r>
+              <a:rPr sz="2000" b="0">
+                <a:solidFill>
+                  <a:srgbClr val="333333"/>
+                </a:solidFill>
+                <a:latin typeface="Calibri"/>
+              </a:rPr>
+              <a:t>Grouping close cells is called clustering, and each group is a cluster</a:t>
+            </a:r>
+          </a:p>
+          <a:p>
+            <a:pPr lvl="0" marL="457200" indent="-228600">
+              <a:buFont typeface="Calibri"/>
+              <a:spcAft>
+                <a:spcPts val="1000"/>
+              </a:spcAft>
+              <a:buSzPct val="100000"/>
+              <a:buChar char="•"/>
+              <a:lnSpc>
+                <a:spcPts val="2200"/>
+              </a:lnSpc>
+            </a:pPr>
+            <a:r>
+              <a:rPr sz="2000" b="0">
+                <a:solidFill>
+                  <a:srgbClr val="333333"/>
+                </a:solidFill>
+                <a:latin typeface="Calibri"/>
+              </a:rPr>
+              <a:t>Think of a seating plan: friends who chat a lot sit at the same table</a:t>
+            </a:r>
+          </a:p>
+          <a:p>
+            <a:pPr lvl="0" marL="457200" indent="-228600">
+              <a:buFont typeface="Calibri"/>
+              <a:spcAft>
+                <a:spcPts val="1000"/>
+              </a:spcAft>
+              <a:buSzPct val="100000"/>
+              <a:buChar char="•"/>
+              <a:lnSpc>
+                <a:spcPts val="2200"/>
+              </a:lnSpc>
+            </a:pPr>
+            <a:r>
+              <a:rPr sz="2000" b="0">
+                <a:solidFill>
+                  <a:srgbClr val="333333"/>
+                </a:solidFill>
+                <a:latin typeface="Calibri"/>
+              </a:rPr>
+              <a:t>Here, A, B and C form one group, and D and E form another</a:t>
+            </a:r>
+          </a:p>
+          <a:p>
+            <a:pPr lvl="0" marL="457200" indent="-228600">
+              <a:buFont typeface="Calibri"/>
+              <a:spcAft>
+                <a:spcPts val="1000"/>
+              </a:spcAft>
+              <a:buSzPct val="100000"/>
+              <a:buChar char="•"/>
+              <a:lnSpc>
+                <a:spcPts val="2200"/>
+              </a:lnSpc>
+            </a:pPr>
+            <a:r>
+              <a:rPr sz="2000" b="0">
+                <a:solidFill>
+                  <a:srgbClr val="333333"/>
+                </a:solidFill>
+                <a:latin typeface="Calibri"/>
+              </a:rPr>
+              <a:t>Only the red edges cross between the groups, and we want as few of those as possible</a:t>
             </a:r>
           </a:p>
         </p:txBody>
       </p:sp>
       <p:pic>
         <p:nvPicPr>
-          <p:cNvPr id="3" name="Picture 2" descr="02-edge-rank.png"/>
+          <p:cNvPr id="4" name="Picture 3" descr="clustering-groups.png"/>
           <p:cNvPicPr>
             <a:picLocks noChangeAspect="1"/>
           </p:cNvPicPr>
@@ -6567,53 +8644,14 @@
         </p:blipFill>
         <p:spPr>
           <a:xfrm>
-            <a:off x="548640" y="1143000"/>
-            <a:ext cx="8629879" cy="4572000"/>
+            <a:off x="6172200" y="1470755"/>
+            <a:ext cx="5394960" cy="4282250"/>
           </a:xfrm>
           <a:prstGeom prst="rect">
             <a:avLst/>
           </a:prstGeom>
         </p:spPr>
       </p:pic>
-      <p:sp>
-        <p:nvSpPr>
-          <p:cNvPr id="4" name="TextBox 3"/>
-          <p:cNvSpPr txBox="1"/>
-          <p:nvPr/>
-        </p:nvSpPr>
-        <p:spPr>
-          <a:xfrm>
-            <a:off x="548640" y="5897880"/>
-            <a:ext cx="11064240" cy="411480"/>
-          </a:xfrm>
-          <a:prstGeom prst="rect">
-            <a:avLst/>
-          </a:prstGeom>
-          <a:noFill/>
-        </p:spPr>
-        <p:txBody>
-          <a:bodyPr wrap="square">
-            <a:noAutofit/>
-          </a:bodyPr>
-          <a:lstStyle/>
-          <a:p>
-            <a:pPr>
-              <a:lnSpc>
-                <a:spcPts val="2200"/>
-              </a:lnSpc>
-            </a:pPr>
-            <a:r>
-              <a:rPr sz="1200" b="0">
-                <a:solidFill>
-                  <a:srgbClr val="333333"/>
-                </a:solidFill>
-                <a:latin typeface="Calibri"/>
-              </a:rPr>
-              <a:t>Edge-weight affinity ranks pairs</a:t>
-            </a:r>
-          </a:p>
-        </p:txBody>
-      </p:sp>
       <p:sp>
         <p:nvSpPr>
           <p:cNvPr id="5" name="TextBox 4"/>
@@ -6705,45 +8743,21 @@
                 </a:solidFill>
                 <a:latin typeface="Calibri"/>
               </a:rPr>
-              <a:t>Shared neighbors boost A–B</a:t>
-            </a:r>
-          </a:p>
-        </p:txBody>
-      </p:sp>
-      <p:pic>
-        <p:nvPicPr>
-          <p:cNvPr id="3" name="Picture 2" descr="03-shared-idea.png"/>
-          <p:cNvPicPr>
-            <a:picLocks noChangeAspect="1"/>
-          </p:cNvPicPr>
-          <p:nvPr/>
-        </p:nvPicPr>
-        <p:blipFill>
-          <a:blip r:embed="rId2"/>
-          <a:stretch>
-            <a:fillRect/>
-          </a:stretch>
-        </p:blipFill>
-        <p:spPr>
-          <a:xfrm>
-            <a:off x="548640" y="1143000"/>
-            <a:ext cx="9404113" cy="4572000"/>
-          </a:xfrm>
-          <a:prstGeom prst="rect">
-            <a:avLst/>
-          </a:prstGeom>
-        </p:spPr>
-      </p:pic>
-      <p:sp>
-        <p:nvSpPr>
-          <p:cNvPr id="4" name="TextBox 3"/>
+              <a:t>What is affinity?</a:t>
+            </a:r>
+          </a:p>
+        </p:txBody>
+      </p:sp>
+      <p:sp>
+        <p:nvSpPr>
+          <p:cNvPr id="3" name="TextBox 2"/>
           <p:cNvSpPr txBox="1"/>
           <p:nvPr/>
         </p:nvSpPr>
         <p:spPr>
           <a:xfrm>
-            <a:off x="548640" y="5897880"/>
-            <a:ext cx="11064240" cy="411480"/>
+            <a:off x="548640" y="1234440"/>
+            <a:ext cx="11064240" cy="4937760"/>
           </a:xfrm>
           <a:prstGeom prst="rect">
             <a:avLst/>
@@ -6756,26 +8770,142 @@
           </a:bodyPr>
           <a:lstStyle/>
           <a:p>
-            <a:pPr>
-              <a:lnSpc>
-                <a:spcPts val="2200"/>
-              </a:lnSpc>
-            </a:pPr>
-            <a:r>
-              <a:rPr sz="1200" b="0">
+            <a:pPr lvl="0" marL="457200" indent="-228600">
+              <a:buFont typeface="Calibri"/>
+              <a:spcAft>
+                <a:spcPts val="1000"/>
+              </a:spcAft>
+              <a:buSzPct val="100000"/>
+              <a:buChar char="•"/>
+              <a:lnSpc>
+                <a:spcPts val="2200"/>
+              </a:lnSpc>
+            </a:pPr>
+            <a:r>
+              <a:rPr sz="2000" b="0">
                 <a:solidFill>
                   <a:srgbClr val="333333"/>
                 </a:solidFill>
                 <a:latin typeface="Calibri"/>
               </a:rPr>
-              <a:t>Shared neighbors boost A–B</a:t>
-            </a:r>
-          </a:p>
-        </p:txBody>
-      </p:sp>
-      <p:sp>
-        <p:nvSpPr>
-          <p:cNvPr id="5" name="TextBox 4"/>
+              <a:t>Affinity is a score for each pair of cells</a:t>
+            </a:r>
+          </a:p>
+          <a:p>
+            <a:pPr lvl="0" marL="457200" indent="-228600">
+              <a:buFont typeface="Calibri"/>
+              <a:spcAft>
+                <a:spcPts val="1000"/>
+              </a:spcAft>
+              <a:buSzPct val="100000"/>
+              <a:buChar char="•"/>
+              <a:lnSpc>
+                <a:spcPts val="2200"/>
+              </a:lnSpc>
+            </a:pPr>
+            <a:r>
+              <a:rPr sz="2000" b="0">
+                <a:solidFill>
+                  <a:srgbClr val="333333"/>
+                </a:solidFill>
+                <a:latin typeface="Calibri"/>
+              </a:rPr>
+              <a:t>A high score means these two should be in the same group</a:t>
+            </a:r>
+          </a:p>
+          <a:p>
+            <a:pPr lvl="0" marL="457200" indent="-228600">
+              <a:buFont typeface="Calibri"/>
+              <a:spcAft>
+                <a:spcPts val="1000"/>
+              </a:spcAft>
+              <a:buSzPct val="100000"/>
+              <a:buChar char="•"/>
+              <a:lnSpc>
+                <a:spcPts val="2200"/>
+              </a:lnSpc>
+            </a:pPr>
+            <a:r>
+              <a:rPr sz="2000" b="0">
+                <a:solidFill>
+                  <a:srgbClr val="333333"/>
+                </a:solidFill>
+                <a:latin typeface="Calibri"/>
+              </a:rPr>
+              <a:t>A low score means they can be apart</a:t>
+            </a:r>
+          </a:p>
+          <a:p>
+            <a:pPr lvl="0" marL="457200" indent="-228600">
+              <a:buFont typeface="Calibri"/>
+              <a:spcAft>
+                <a:spcPts val="1000"/>
+              </a:spcAft>
+              <a:buSzPct val="100000"/>
+              <a:buChar char="•"/>
+              <a:lnSpc>
+                <a:spcPts val="2200"/>
+              </a:lnSpc>
+            </a:pPr>
+            <a:r>
+              <a:rPr sz="2000" b="0">
+                <a:solidFill>
+                  <a:srgbClr val="333333"/>
+                </a:solidFill>
+                <a:latin typeface="Calibri"/>
+              </a:rPr>
+              <a:t>Clustering algorithms merge the pair with the highest score first</a:t>
+            </a:r>
+          </a:p>
+          <a:p>
+            <a:pPr lvl="0" marL="457200" indent="-228600">
+              <a:buFont typeface="Calibri"/>
+              <a:spcAft>
+                <a:spcPts val="1000"/>
+              </a:spcAft>
+              <a:buSzPct val="100000"/>
+              <a:buChar char="•"/>
+              <a:lnSpc>
+                <a:spcPts val="2200"/>
+              </a:lnSpc>
+            </a:pPr>
+            <a:r>
+              <a:rPr sz="2000" b="0">
+                <a:solidFill>
+                  <a:srgbClr val="333333"/>
+                </a:solidFill>
+                <a:latin typeface="Calibri"/>
+              </a:rPr>
+              <a:t>So the recipe for the score decides everything that follows</a:t>
+            </a:r>
+          </a:p>
+          <a:p>
+            <a:pPr lvl="0" marL="457200" indent="-228600">
+              <a:buFont typeface="Calibri"/>
+              <a:spcAft>
+                <a:spcPts val="1000"/>
+              </a:spcAft>
+              <a:buSzPct val="100000"/>
+              <a:buChar char="•"/>
+              <a:lnSpc>
+                <a:spcPts val="2200"/>
+              </a:lnSpc>
+            </a:pPr>
+            <a:r>
+              <a:rPr sz="2000" b="0">
+                <a:solidFill>
+                  <a:srgbClr val="333333"/>
+                </a:solidFill>
+                <a:latin typeface="Calibri"/>
+              </a:rPr>
+              <a:t>This lab compares three recipes on the same small example</a:t>
+            </a:r>
+          </a:p>
+        </p:txBody>
+      </p:sp>
+      <p:sp>
+        <p:nvSpPr>
+          <p:cNvPr id="4" name="TextBox 3"/>
           <p:cNvSpPr txBox="1"/>
           <p:nvPr/>
         </p:nvSpPr>
@@ -6864,14 +8994,14 @@
                 </a:solidFill>
                 <a:latin typeface="Calibri"/>
               </a:rPr>
-              <a:t>Shared ranking reshuffles the list</a:t>
+              <a:t>Start with a tiny weighted graph</a:t>
             </a:r>
           </a:p>
         </p:txBody>
       </p:sp>
       <p:pic>
         <p:nvPicPr>
-          <p:cNvPr id="3" name="Picture 2" descr="04-shared-rank.png"/>
+          <p:cNvPr id="3" name="Picture 2" descr="01-raw-graph.png"/>
           <p:cNvPicPr>
             <a:picLocks noChangeAspect="1"/>
           </p:cNvPicPr>
@@ -6886,7 +9016,7 @@
         <p:spPr>
           <a:xfrm>
             <a:off x="548640" y="1143000"/>
-            <a:ext cx="8629879" cy="4572000"/>
+            <a:ext cx="9404113" cy="4572000"/>
           </a:xfrm>
           <a:prstGeom prst="rect">
             <a:avLst/>
@@ -6927,7 +9057,7 @@
                 </a:solidFill>
                 <a:latin typeface="Calibri"/>
               </a:rPr>
-              <a:t>Shared ranking reshuffles the list</a:t>
+              <a:t>Start with a tiny weighted graph</a:t>
             </a:r>
           </a:p>
         </p:txBody>
@@ -7023,14 +9153,14 @@
                 </a:solidFill>
                 <a:latin typeface="Calibri"/>
               </a:rPr>
-              <a:t>Why affinity matters in EDA</a:t>
+              <a:t>Edge-weight affinity ranks pairs</a:t>
             </a:r>
           </a:p>
         </p:txBody>
       </p:sp>
       <p:pic>
         <p:nvPicPr>
-          <p:cNvPr id="3" name="Picture 2" descr="05-takeaway.png"/>
+          <p:cNvPr id="3" name="Picture 2" descr="02-edge-rank.png"/>
           <p:cNvPicPr>
             <a:picLocks noChangeAspect="1"/>
           </p:cNvPicPr>
@@ -7045,7 +9175,7 @@
         <p:spPr>
           <a:xfrm>
             <a:off x="548640" y="1143000"/>
-            <a:ext cx="9404113" cy="4572000"/>
+            <a:ext cx="8629879" cy="4572000"/>
           </a:xfrm>
           <a:prstGeom prst="rect">
             <a:avLst/>
@@ -7086,7 +9216,7 @@
                 </a:solidFill>
                 <a:latin typeface="Calibri"/>
               </a:rPr>
-              <a:t>Why affinity matters in EDA</a:t>
+              <a:t>Edge-weight affinity ranks pairs</a:t>
             </a:r>
           </a:p>
         </p:txBody>
@@ -7182,21 +9312,45 @@
                 </a:solidFill>
                 <a:latin typeface="Calibri"/>
               </a:rPr>
-              <a:t>Shared-neighbor scoring as pseudocode</a:t>
-            </a:r>
-          </a:p>
-        </p:txBody>
-      </p:sp>
-      <p:sp>
-        <p:nvSpPr>
-          <p:cNvPr id="3" name="TextBox 2"/>
+              <a:t>Shared neighbors boost A–B</a:t>
+            </a:r>
+          </a:p>
+        </p:txBody>
+      </p:sp>
+      <p:pic>
+        <p:nvPicPr>
+          <p:cNvPr id="3" name="Picture 2" descr="03-shared-idea.png"/>
+          <p:cNvPicPr>
+            <a:picLocks noChangeAspect="1"/>
+          </p:cNvPicPr>
+          <p:nvPr/>
+        </p:nvPicPr>
+        <p:blipFill>
+          <a:blip r:embed="rId2"/>
+          <a:stretch>
+            <a:fillRect/>
+          </a:stretch>
+        </p:blipFill>
+        <p:spPr>
+          <a:xfrm>
+            <a:off x="548640" y="1143000"/>
+            <a:ext cx="9404113" cy="4572000"/>
+          </a:xfrm>
+          <a:prstGeom prst="rect">
+            <a:avLst/>
+          </a:prstGeom>
+        </p:spPr>
+      </p:pic>
+      <p:sp>
+        <p:nvSpPr>
+          <p:cNvPr id="4" name="TextBox 3"/>
           <p:cNvSpPr txBox="1"/>
           <p:nvPr/>
         </p:nvSpPr>
         <p:spPr>
           <a:xfrm>
-            <a:off x="548640" y="1234440"/>
-            <a:ext cx="11064240" cy="4937760"/>
+            <a:off x="548640" y="5897880"/>
+            <a:ext cx="11064240" cy="411480"/>
           </a:xfrm>
           <a:prstGeom prst="rect">
             <a:avLst/>
@@ -7209,120 +9363,26 @@
           </a:bodyPr>
           <a:lstStyle/>
           <a:p>
-            <a:pPr lvl="0" marL="457200" indent="-228600">
-              <a:buFont typeface="Calibri"/>
-              <a:spcAft>
-                <a:spcPts val="1000"/>
-              </a:spcAft>
-              <a:buSzPct val="100000"/>
-              <a:buChar char="•"/>
-              <a:lnSpc>
-                <a:spcPts val="2200"/>
-              </a:lnSpc>
-            </a:pPr>
-            <a:r>
-              <a:rPr sz="2000" b="0">
+            <a:pPr>
+              <a:lnSpc>
+                <a:spcPts val="2200"/>
+              </a:lnSpc>
+            </a:pPr>
+            <a:r>
+              <a:rPr sz="1200" b="0">
                 <a:solidFill>
                   <a:srgbClr val="333333"/>
                 </a:solidFill>
                 <a:latin typeface="Calibri"/>
               </a:rPr>
-              <a:t>Here is the shared-neighbor score as code</a:t>
-            </a:r>
-          </a:p>
-          <a:p>
-            <a:pPr lvl="0" marL="457200" indent="-228600">
-              <a:buFont typeface="Calibri"/>
-              <a:spcAft>
-                <a:spcPts val="1000"/>
-              </a:spcAft>
-              <a:buSzPct val="100000"/>
-              <a:buChar char="•"/>
-              <a:lnSpc>
-                <a:spcPts val="2200"/>
-              </a:lnSpc>
-            </a:pPr>
-            <a:r>
-              <a:rPr sz="2000" b="0">
-                <a:solidFill>
-                  <a:srgbClr val="333333"/>
-                </a:solidFill>
-                <a:latin typeface="Calibri"/>
-              </a:rPr>
-              <a:t>First, every existing edge adds its weight to its pair</a:t>
-            </a:r>
-          </a:p>
-          <a:p>
-            <a:pPr lvl="0" marL="457200" indent="-228600">
-              <a:buFont typeface="Calibri"/>
-              <a:spcAft>
-                <a:spcPts val="1000"/>
-              </a:spcAft>
-              <a:buSzPct val="100000"/>
-              <a:buChar char="•"/>
-              <a:lnSpc>
-                <a:spcPts val="2200"/>
-              </a:lnSpc>
-            </a:pPr>
-            <a:r>
-              <a:rPr sz="2000" b="0">
-                <a:solidFill>
-                  <a:srgbClr val="333333"/>
-                </a:solidFill>
-                <a:latin typeface="Calibri"/>
-              </a:rPr>
-              <a:t>Then, for every pair of nodes, look at each neighbor they have in common</a:t>
-            </a:r>
-          </a:p>
-          <a:p>
-            <a:pPr lvl="0" marL="457200" indent="-228600">
-              <a:buFont typeface="Calibri"/>
-              <a:spcAft>
-                <a:spcPts val="1000"/>
-              </a:spcAft>
-              <a:buSzPct val="100000"/>
-              <a:buChar char="•"/>
-              <a:lnSpc>
-                <a:spcPts val="2200"/>
-              </a:lnSpc>
-            </a:pPr>
-            <a:r>
-              <a:rPr sz="2000" b="0">
-                <a:solidFill>
-                  <a:srgbClr val="333333"/>
-                </a:solidFill>
-                <a:latin typeface="Calibri"/>
-              </a:rPr>
-              <a:t>If a pair ends up with a score above zero, keep it</a:t>
-            </a:r>
-          </a:p>
-          <a:p>
-            <a:pPr lvl="0" marL="457200" indent="-228600">
-              <a:buFont typeface="Calibri"/>
-              <a:spcAft>
-                <a:spcPts val="1000"/>
-              </a:spcAft>
-              <a:buSzPct val="100000"/>
-              <a:buChar char="•"/>
-              <a:lnSpc>
-                <a:spcPts val="2200"/>
-              </a:lnSpc>
-            </a:pPr>
-            <a:r>
-              <a:rPr sz="2000" b="0">
-                <a:solidFill>
-                  <a:srgbClr val="333333"/>
-                </a:solidFill>
-                <a:latin typeface="Calibri"/>
-              </a:rPr>
-              <a:t>Finally, sort by score, highest first</a:t>
-            </a:r>
-          </a:p>
-        </p:txBody>
-      </p:sp>
-      <p:sp>
-        <p:nvSpPr>
-          <p:cNvPr id="4" name="TextBox 3"/>
+              <a:t>Shared neighbors boost A–B</a:t>
+            </a:r>
+          </a:p>
+        </p:txBody>
+      </p:sp>
+      <p:sp>
+        <p:nvSpPr>
+          <p:cNvPr id="5" name="TextBox 4"/>
           <p:cNvSpPr txBox="1"/>
           <p:nvPr/>
         </p:nvSpPr>
@@ -7411,28 +9471,50 @@
                 </a:solidFill>
                 <a:latin typeface="Calibri"/>
               </a:rPr>
-              <a:t>Shared-neighbor scoring as pseudocode — try these</a:t>
-            </a:r>
-          </a:p>
-        </p:txBody>
-      </p:sp>
-      <p:sp>
-        <p:nvSpPr>
-          <p:cNvPr id="3" name="TextBox 2"/>
-          <p:cNvSpPr txBox="1"/>
+              <a:t>Shared ranking reshuffles the list</a:t>
+            </a:r>
+          </a:p>
+        </p:txBody>
+      </p:sp>
+      <p:pic>
+        <p:nvPicPr>
+          <p:cNvPr id="3" name="Picture 2" descr="04-shared-rank.png"/>
+          <p:cNvPicPr>
+            <a:picLocks noChangeAspect="1"/>
+          </p:cNvPicPr>
           <p:nvPr/>
-        </p:nvSpPr>
+        </p:nvPicPr>
+        <p:blipFill>
+          <a:blip r:embed="rId2"/>
+          <a:stretch>
+            <a:fillRect/>
+          </a:stretch>
+        </p:blipFill>
         <p:spPr>
           <a:xfrm>
             <a:off x="548640" y="1143000"/>
-            <a:ext cx="11064240" cy="5029200"/>
+            <a:ext cx="8629879" cy="4572000"/>
           </a:xfrm>
           <a:prstGeom prst="rect">
             <a:avLst/>
           </a:prstGeom>
-          <a:solidFill>
-            <a:srgbClr val="F4F4F4"/>
-          </a:solidFill>
+        </p:spPr>
+      </p:pic>
+      <p:sp>
+        <p:nvSpPr>
+          <p:cNvPr id="4" name="TextBox 3"/>
+          <p:cNvSpPr txBox="1"/>
+          <p:nvPr/>
+        </p:nvSpPr>
+        <p:spPr>
+          <a:xfrm>
+            <a:off x="548640" y="5897880"/>
+            <a:ext cx="11064240" cy="411480"/>
+          </a:xfrm>
+          <a:prstGeom prst="rect">
+            <a:avLst/>
+          </a:prstGeom>
+          <a:noFill/>
         </p:spPr>
         <p:txBody>
           <a:bodyPr wrap="square">
@@ -7444,196 +9526,22 @@
               <a:lnSpc>
                 <a:spcPts val="2200"/>
               </a:lnSpc>
-              <a:spcAft>
-                <a:spcPts val="400"/>
-              </a:spcAft>
-            </a:pPr>
-            <a:r>
-              <a:rPr sz="2000" b="0">
+            </a:pPr>
+            <a:r>
+              <a:rPr sz="1200" b="0">
                 <a:solidFill>
                   <a:srgbClr val="333333"/>
                 </a:solidFill>
-                <a:latin typeface="Consolas"/>
-              </a:rPr>
-              <a:t>affinity_shared_neighbors(nodes, edges):</a:t>
-            </a:r>
-          </a:p>
-          <a:p>
-            <a:pPr>
-              <a:lnSpc>
-                <a:spcPts val="2200"/>
-              </a:lnSpc>
-              <a:spcAft>
-                <a:spcPts val="400"/>
-              </a:spcAft>
-            </a:pPr>
-            <a:r>
-              <a:rPr sz="2000" b="0">
-                <a:solidFill>
-                  <a:srgbClr val="333333"/>
-                </a:solidFill>
-                <a:latin typeface="Consolas"/>
-              </a:rPr>
-              <a:t>  score[u,v] = w(u,v) for every edge</a:t>
-            </a:r>
-          </a:p>
-          <a:p>
-            <a:pPr>
-              <a:lnSpc>
-                <a:spcPts val="2200"/>
-              </a:lnSpc>
-              <a:spcAft>
-                <a:spcPts val="400"/>
-              </a:spcAft>
-            </a:pPr>
-            <a:r>
-              <a:rPr sz="2000" b="0">
-                <a:solidFill>
-                  <a:srgbClr val="333333"/>
-                </a:solidFill>
-                <a:latin typeface="Consolas"/>
-              </a:rPr>
-              <a:t>  for every pair (u, v) of nodes:</a:t>
-            </a:r>
-          </a:p>
-          <a:p>
-            <a:pPr>
-              <a:lnSpc>
-                <a:spcPts val="2200"/>
-              </a:lnSpc>
-              <a:spcAft>
-                <a:spcPts val="400"/>
-              </a:spcAft>
-            </a:pPr>
-            <a:r>
-              <a:rPr sz="2000" b="0">
-                <a:solidFill>
-                  <a:srgbClr val="333333"/>
-                </a:solidFill>
-                <a:latin typeface="Consolas"/>
-              </a:rPr>
-              <a:t>    s = 0</a:t>
-            </a:r>
-          </a:p>
-          <a:p>
-            <a:pPr>
-              <a:lnSpc>
-                <a:spcPts val="2200"/>
-              </a:lnSpc>
-              <a:spcAft>
-                <a:spcPts val="400"/>
-              </a:spcAft>
-            </a:pPr>
-            <a:r>
-              <a:rPr sz="2000" b="0">
-                <a:solidFill>
-                  <a:srgbClr val="333333"/>
-                </a:solidFill>
-                <a:latin typeface="Consolas"/>
-              </a:rPr>
-              <a:t>    for x in neighbors(u), x != v:</a:t>
-            </a:r>
-          </a:p>
-          <a:p>
-            <a:pPr>
-              <a:lnSpc>
-                <a:spcPts val="2200"/>
-              </a:lnSpc>
-              <a:spcAft>
-                <a:spcPts val="400"/>
-              </a:spcAft>
-            </a:pPr>
-            <a:r>
-              <a:rPr sz="2000" b="0">
-                <a:solidFill>
-                  <a:srgbClr val="333333"/>
-                </a:solidFill>
-                <a:latin typeface="Consolas"/>
-              </a:rPr>
-              <a:t>      if x in neighbors(v):</a:t>
-            </a:r>
-          </a:p>
-          <a:p>
-            <a:pPr>
-              <a:lnSpc>
-                <a:spcPts val="2200"/>
-              </a:lnSpc>
-              <a:spcAft>
-                <a:spcPts val="400"/>
-              </a:spcAft>
-            </a:pPr>
-            <a:r>
-              <a:rPr sz="2000" b="0">
-                <a:solidFill>
-                  <a:srgbClr val="333333"/>
-                </a:solidFill>
-                <a:latin typeface="Consolas"/>
-              </a:rPr>
-              <a:t>        s += min(w(u,x), w(v,x))</a:t>
-            </a:r>
-          </a:p>
-          <a:p>
-            <a:pPr>
-              <a:lnSpc>
-                <a:spcPts val="2200"/>
-              </a:lnSpc>
-              <a:spcAft>
-                <a:spcPts val="400"/>
-              </a:spcAft>
-            </a:pPr>
-            <a:r>
-              <a:rPr sz="2000" b="0">
-                <a:solidFill>
-                  <a:srgbClr val="333333"/>
-                </a:solidFill>
-                <a:latin typeface="Consolas"/>
-              </a:rPr>
-              <a:t>    if s &gt; 0 or (u,v) has an edge:</a:t>
-            </a:r>
-          </a:p>
-          <a:p>
-            <a:pPr>
-              <a:lnSpc>
-                <a:spcPts val="2200"/>
-              </a:lnSpc>
-              <a:spcAft>
-                <a:spcPts val="400"/>
-              </a:spcAft>
-            </a:pPr>
-            <a:r>
-              <a:rPr sz="2000" b="0">
-                <a:solidFill>
-                  <a:srgbClr val="333333"/>
-                </a:solidFill>
-                <a:latin typeface="Consolas"/>
-              </a:rPr>
-              <a:t>      score[u,v] += s</a:t>
-            </a:r>
-          </a:p>
-          <a:p>
-            <a:pPr>
-              <a:lnSpc>
-                <a:spcPts val="2200"/>
-              </a:lnSpc>
-              <a:spcAft>
-                <a:spcPts val="400"/>
-              </a:spcAft>
-            </a:pPr>
-            <a:r>
-              <a:rPr sz="2000" b="0">
-                <a:solidFill>
-                  <a:srgbClr val="333333"/>
-                </a:solidFill>
-                <a:latin typeface="Consolas"/>
-              </a:rPr>
-              <a:t>  sort by score (high first), then u, then v</a:t>
-            </a:r>
-          </a:p>
-        </p:txBody>
-      </p:sp>
-      <p:sp>
-        <p:nvSpPr>
-          <p:cNvPr id="4" name="TextBox 3"/>
+                <a:latin typeface="Calibri"/>
+              </a:rPr>
+              <a:t>Shared ranking reshuffles the list</a:t>
+            </a:r>
+          </a:p>
+        </p:txBody>
+      </p:sp>
+      <p:sp>
+        <p:nvSpPr>
+          <p:cNvPr id="5" name="TextBox 4"/>
           <p:cNvSpPr txBox="1"/>
           <p:nvPr/>
         </p:nvSpPr>
@@ -7722,21 +9630,45 @@
                 </a:solidFill>
                 <a:latin typeface="Calibri"/>
               </a:rPr>
-              <a:t>Ten pairs, not six</a:t>
-            </a:r>
-          </a:p>
-        </p:txBody>
-      </p:sp>
-      <p:sp>
-        <p:nvSpPr>
-          <p:cNvPr id="3" name="TextBox 2"/>
+              <a:t>Why affinity matters in EDA</a:t>
+            </a:r>
+          </a:p>
+        </p:txBody>
+      </p:sp>
+      <p:pic>
+        <p:nvPicPr>
+          <p:cNvPr id="3" name="Picture 2" descr="05-takeaway.png"/>
+          <p:cNvPicPr>
+            <a:picLocks noChangeAspect="1"/>
+          </p:cNvPicPr>
+          <p:nvPr/>
+        </p:nvPicPr>
+        <p:blipFill>
+          <a:blip r:embed="rId2"/>
+          <a:stretch>
+            <a:fillRect/>
+          </a:stretch>
+        </p:blipFill>
+        <p:spPr>
+          <a:xfrm>
+            <a:off x="548640" y="1143000"/>
+            <a:ext cx="9404113" cy="4572000"/>
+          </a:xfrm>
+          <a:prstGeom prst="rect">
+            <a:avLst/>
+          </a:prstGeom>
+        </p:spPr>
+      </p:pic>
+      <p:sp>
+        <p:nvSpPr>
+          <p:cNvPr id="4" name="TextBox 3"/>
           <p:cNvSpPr txBox="1"/>
           <p:nvPr/>
         </p:nvSpPr>
         <p:spPr>
           <a:xfrm>
-            <a:off x="548640" y="1234440"/>
-            <a:ext cx="11064240" cy="4937760"/>
+            <a:off x="548640" y="5897880"/>
+            <a:ext cx="11064240" cy="411480"/>
           </a:xfrm>
           <a:prstGeom prst="rect">
             <a:avLst/>
@@ -7749,142 +9681,26 @@
           </a:bodyPr>
           <a:lstStyle/>
           <a:p>
-            <a:pPr lvl="0" marL="457200" indent="-228600">
-              <a:buFont typeface="Calibri"/>
-              <a:spcAft>
-                <a:spcPts val="1000"/>
-              </a:spcAft>
-              <a:buSzPct val="100000"/>
-              <a:buChar char="•"/>
-              <a:lnSpc>
-                <a:spcPts val="2200"/>
-              </a:lnSpc>
-            </a:pPr>
-            <a:r>
-              <a:rPr sz="2000" b="0">
+            <a:pPr>
+              <a:lnSpc>
+                <a:spcPts val="2200"/>
+              </a:lnSpc>
+            </a:pPr>
+            <a:r>
+              <a:rPr sz="1200" b="0">
                 <a:solidFill>
                   <a:srgbClr val="333333"/>
                 </a:solidFill>
                 <a:latin typeface="Calibri"/>
               </a:rPr>
-              <a:t>Under shared-neighbor scoring the starter graph produces ten pairs, not six</a:t>
-            </a:r>
-          </a:p>
-          <a:p>
-            <a:pPr lvl="0" marL="457200" indent="-228600">
-              <a:buFont typeface="Calibri"/>
-              <a:spcAft>
-                <a:spcPts val="1000"/>
-              </a:spcAft>
-              <a:buSzPct val="100000"/>
-              <a:buChar char="•"/>
-              <a:lnSpc>
-                <a:spcPts val="2200"/>
-              </a:lnSpc>
-            </a:pPr>
-            <a:r>
-              <a:rPr sz="2000" b="0">
-                <a:solidFill>
-                  <a:srgbClr val="333333"/>
-                </a:solidFill>
-                <a:latin typeface="Calibri"/>
-              </a:rPr>
-              <a:t>Four of them have no edge at all</a:t>
-            </a:r>
-          </a:p>
-          <a:p>
-            <a:pPr lvl="0" marL="457200" indent="-228600">
-              <a:buFont typeface="Calibri"/>
-              <a:spcAft>
-                <a:spcPts val="1000"/>
-              </a:spcAft>
-              <a:buSzPct val="100000"/>
-              <a:buChar char="•"/>
-              <a:lnSpc>
-                <a:spcPts val="2200"/>
-              </a:lnSpc>
-            </a:pPr>
-            <a:r>
-              <a:rPr sz="2000" b="0">
-                <a:solidFill>
-                  <a:srgbClr val="333333"/>
-                </a:solidFill>
-                <a:latin typeface="Calibri"/>
-              </a:rPr>
-              <a:t>B and D both connect to C, so B–D scores the smaller spoke, two</a:t>
-            </a:r>
-          </a:p>
-          <a:p>
-            <a:pPr lvl="0" marL="457200" indent="-228600">
-              <a:buFont typeface="Calibri"/>
-              <a:spcAft>
-                <a:spcPts val="1000"/>
-              </a:spcAft>
-              <a:buSzPct val="100000"/>
-              <a:buChar char="•"/>
-              <a:lnSpc>
-                <a:spcPts val="2200"/>
-              </a:lnSpc>
-            </a:pPr>
-            <a:r>
-              <a:rPr sz="2000" b="0">
-                <a:solidFill>
-                  <a:srgbClr val="333333"/>
-                </a:solidFill>
-                <a:latin typeface="Calibri"/>
-              </a:rPr>
-              <a:t>A–D, A–E and B–E each pick up one through C</a:t>
-            </a:r>
-          </a:p>
-          <a:p>
-            <a:pPr lvl="0" marL="457200" indent="-228600">
-              <a:buFont typeface="Calibri"/>
-              <a:spcAft>
-                <a:spcPts val="1000"/>
-              </a:spcAft>
-              <a:buSzPct val="100000"/>
-              <a:buChar char="•"/>
-              <a:lnSpc>
-                <a:spcPts val="2200"/>
-              </a:lnSpc>
-            </a:pPr>
-            <a:r>
-              <a:rPr sz="2000" b="0">
-                <a:solidFill>
-                  <a:srgbClr val="333333"/>
-                </a:solidFill>
-                <a:latin typeface="Calibri"/>
-              </a:rPr>
-              <a:t>These pairs aren't mistakes: they say two cells are close even without a direct wire</a:t>
-            </a:r>
-          </a:p>
-          <a:p>
-            <a:pPr lvl="0" marL="457200" indent="-228600">
-              <a:buFont typeface="Calibri"/>
-              <a:spcAft>
-                <a:spcPts val="1000"/>
-              </a:spcAft>
-              <a:buSzPct val="100000"/>
-              <a:buChar char="•"/>
-              <a:lnSpc>
-                <a:spcPts val="2200"/>
-              </a:lnSpc>
-            </a:pPr>
-            <a:r>
-              <a:rPr sz="2000" b="0">
-                <a:solidFill>
-                  <a:srgbClr val="333333"/>
-                </a:solidFill>
-                <a:latin typeface="Calibri"/>
-              </a:rPr>
-              <a:t>A pair is only left out when its score would be zero</a:t>
-            </a:r>
-          </a:p>
-        </p:txBody>
-      </p:sp>
-      <p:sp>
-        <p:nvSpPr>
-          <p:cNvPr id="4" name="TextBox 3"/>
+              <a:t>Why affinity matters in EDA</a:t>
+            </a:r>
+          </a:p>
+        </p:txBody>
+      </p:sp>
+      <p:sp>
+        <p:nvSpPr>
+          <p:cNvPr id="5" name="TextBox 4"/>
           <p:cNvSpPr txBox="1"/>
           <p:nvPr/>
         </p:nvSpPr>
